--- a/report/Sentiment_Analysis_Presentation.pptx
+++ b/report/Sentiment_Analysis_Presentation.pptx
@@ -4,6 +4,9 @@
   <p:sldMasterIdLst>
     <p:sldMasterId id="2147483648" r:id="rId1"/>
   </p:sldMasterIdLst>
+  <p:notesMasterIdLst>
+    <p:notesMasterId r:id="rId11"/>
+  </p:notesMasterIdLst>
   <p:sldIdLst>
     <p:sldId id="256" r:id="rId2"/>
     <p:sldId id="257" r:id="rId3"/>
@@ -15,10 +18,7 @@
     <p:sldId id="263" r:id="rId9"/>
     <p:sldId id="264" r:id="rId10"/>
   </p:sldIdLst>
-  <p:notesMasterIdLst>
-    <p:notesMasterId r:id="rId11"/>
-  </p:notesMasterIdLst>
-  <p:sldSz cx="9144000" cy="5143500"/>
+  <p:sldSz cx="9144000" cy="5143500" type="screen16x9"/>
   <p:notesSz cx="5143500" cy="9144000"/>
   <p:defaultTextStyle>
     <a:lvl1pPr marL="0" algn="l" defTabSz="914400" rtl="0" eaLnBrk="1" latinLnBrk="0" hangingPunct="1">
@@ -112,6 +112,11 @@
       </a:defRPr>
     </a:lvl9pPr>
   </p:defaultTextStyle>
+  <p:extLst>
+    <p:ext uri="{EFAFB233-063F-42B5-8137-9DF3F51BA10A}">
+      <p15:sldGuideLst xmlns:p15="http://schemas.microsoft.com/office/powerpoint/2012/main"/>
+    </p:ext>
+  </p:extLst>
 </p:presentation>
 </file>
 
@@ -137,234 +142,10 @@
           <a:chExt cx="0" cy="0"/>
         </a:xfrm>
       </p:grpSpPr>
-      <p:sp>
-        <p:nvSpPr>
-          <p:cNvPr id="2" name="Header Placeholder 1"/>
-          <p:cNvSpPr>
-            <a:spLocks noGrp="1"/>
-          </p:cNvSpPr>
-          <p:nvPr>
-            <p:ph type="hdr" sz="quarter"/>
-          </p:nvPr>
-        </p:nvSpPr>
-        <p:spPr>
-          <a:xfrm>
-            <a:off x="0" y="0"/>
-            <a:ext cx="2971800" cy="458788"/>
-          </a:xfrm>
-          <a:prstGeom prst="rect">
-            <a:avLst/>
-          </a:prstGeom>
-        </p:spPr>
-        <p:txBody>
-          <a:bodyPr vert="horz" lIns="91440" tIns="45720" rIns="91440" bIns="45720" rtlCol="0"/>
-          <a:lstStyle>
-            <a:lvl1pPr algn="l">
-              <a:defRPr sz="1200"/>
-            </a:lvl1pPr>
-          </a:lstStyle>
-          <a:p>
-            <a:endParaRPr lang="en-US"/>
-          </a:p>
-        </p:txBody>
-      </p:sp>
-      <p:sp>
-        <p:nvSpPr>
-          <p:cNvPr id="3" name="Date Placeholder 2"/>
-          <p:cNvSpPr>
-            <a:spLocks noGrp="1"/>
-          </p:cNvSpPr>
-          <p:nvPr>
-            <p:ph type="dt" idx="1"/>
-          </p:nvPr>
-        </p:nvSpPr>
-        <p:spPr>
-          <a:xfrm>
-            <a:off x="3884613" y="0"/>
-            <a:ext cx="2971800" cy="458788"/>
-          </a:xfrm>
-          <a:prstGeom prst="rect">
-            <a:avLst/>
-          </a:prstGeom>
-        </p:spPr>
-        <p:txBody>
-          <a:bodyPr vert="horz" lIns="91440" tIns="45720" rIns="91440" bIns="45720" rtlCol="0"/>
-          <a:lstStyle>
-            <a:lvl1pPr algn="r">
-              <a:defRPr sz="1200"/>
-            </a:lvl1pPr>
-          </a:lstStyle>
-          <a:p>
-            <a:fld id="{5282F153-3F37-0F45-9E97-73ACFA13230C}" type="datetimeFigureOut">
-              <a:rPr lang="en-US"/>
-              <a:t>7/23/19</a:t>
-            </a:fld>
-            <a:endParaRPr lang="en-US"/>
-          </a:p>
-        </p:txBody>
-      </p:sp>
-      <p:sp>
-        <p:nvSpPr>
-          <p:cNvPr id="4" name="Slide Image Placeholder 3"/>
-          <p:cNvSpPr>
-            <a:spLocks noGrp="1" noRot="1" noChangeAspect="1"/>
-          </p:cNvSpPr>
-          <p:nvPr>
-            <p:ph type="sldImg" idx="2"/>
-          </p:nvPr>
-        </p:nvSpPr>
-        <p:spPr>
-          <a:xfrm>
-            <a:off x="685800" y="1143000"/>
-            <a:ext cx="5486400" cy="3086100"/>
-          </a:xfrm>
-          <a:prstGeom prst="rect">
-            <a:avLst/>
-          </a:prstGeom>
-          <a:noFill/>
-          <a:ln w="12700">
-            <a:solidFill>
-              <a:prstClr val="black"/>
-            </a:solidFill>
-          </a:ln>
-        </p:spPr>
-        <p:txBody>
-          <a:bodyPr vert="horz" lIns="91440" tIns="45720" rIns="91440" bIns="45720" rtlCol="0" anchor="ctr"/>
-          <a:lstStyle/>
-          <a:p>
-            <a:endParaRPr lang="en-US"/>
-          </a:p>
-        </p:txBody>
-      </p:sp>
-      <p:sp>
-        <p:nvSpPr>
-          <p:cNvPr id="5" name="Notes Placeholder 4"/>
-          <p:cNvSpPr>
-            <a:spLocks noGrp="1"/>
-          </p:cNvSpPr>
-          <p:nvPr>
-            <p:ph type="body" sz="quarter" idx="3"/>
-          </p:nvPr>
-        </p:nvSpPr>
-        <p:spPr>
-          <a:xfrm>
-            <a:off x="685800" y="4400550"/>
-            <a:ext cx="5486400" cy="3600450"/>
-          </a:xfrm>
-          <a:prstGeom prst="rect">
-            <a:avLst/>
-          </a:prstGeom>
-        </p:spPr>
-        <p:txBody>
-          <a:bodyPr vert="horz" lIns="91440" tIns="45720" rIns="91440" bIns="45720" rtlCol="0"/>
-          <a:lstStyle/>
-          <a:p>
-            <a:pPr lvl="0"/>
-            <a:r>
-              <a:rPr lang="en-US"/>
-              <a:t>Click to edit Master text styles</a:t>
-            </a:r>
-          </a:p>
-          <a:p>
-            <a:pPr lvl="1"/>
-            <a:r>
-              <a:rPr lang="en-US"/>
-              <a:t>Second level</a:t>
-            </a:r>
-          </a:p>
-          <a:p>
-            <a:pPr lvl="2"/>
-            <a:r>
-              <a:rPr lang="en-US"/>
-              <a:t>Third level</a:t>
-            </a:r>
-          </a:p>
-          <a:p>
-            <a:pPr lvl="3"/>
-            <a:r>
-              <a:rPr lang="en-US"/>
-              <a:t>Fourth level</a:t>
-            </a:r>
-          </a:p>
-          <a:p>
-            <a:pPr lvl="4"/>
-            <a:r>
-              <a:rPr lang="en-US"/>
-              <a:t>Fifth level</a:t>
-            </a:r>
-          </a:p>
-        </p:txBody>
-      </p:sp>
-      <p:sp>
-        <p:nvSpPr>
-          <p:cNvPr id="6" name="Footer Placeholder 5"/>
-          <p:cNvSpPr>
-            <a:spLocks noGrp="1"/>
-          </p:cNvSpPr>
-          <p:nvPr>
-            <p:ph type="ftr" sz="quarter" idx="4"/>
-          </p:nvPr>
-        </p:nvSpPr>
-        <p:spPr>
-          <a:xfrm>
-            <a:off x="0" y="8685213"/>
-            <a:ext cx="2971800" cy="458787"/>
-          </a:xfrm>
-          <a:prstGeom prst="rect">
-            <a:avLst/>
-          </a:prstGeom>
-        </p:spPr>
-        <p:txBody>
-          <a:bodyPr vert="horz" lIns="91440" tIns="45720" rIns="91440" bIns="45720" rtlCol="0" anchor="b"/>
-          <a:lstStyle>
-            <a:lvl1pPr algn="l">
-              <a:defRPr sz="1200"/>
-            </a:lvl1pPr>
-          </a:lstStyle>
-          <a:p>
-            <a:endParaRPr lang="en-US"/>
-          </a:p>
-        </p:txBody>
-      </p:sp>
-      <p:sp>
-        <p:nvSpPr>
-          <p:cNvPr id="7" name="Slide Number Placeholder 6"/>
-          <p:cNvSpPr>
-            <a:spLocks noGrp="1"/>
-          </p:cNvSpPr>
-          <p:nvPr>
-            <p:ph type="sldNum" sz="quarter" idx="5"/>
-          </p:nvPr>
-        </p:nvSpPr>
-        <p:spPr>
-          <a:xfrm>
-            <a:off x="3884613" y="8685213"/>
-            <a:ext cx="2971800" cy="458787"/>
-          </a:xfrm>
-          <a:prstGeom prst="rect">
-            <a:avLst/>
-          </a:prstGeom>
-        </p:spPr>
-        <p:txBody>
-          <a:bodyPr vert="horz" lIns="91440" tIns="45720" rIns="91440" bIns="45720" rtlCol="0" anchor="b"/>
-          <a:lstStyle>
-            <a:lvl1pPr algn="r">
-              <a:defRPr sz="1200"/>
-            </a:lvl1pPr>
-          </a:lstStyle>
-          <a:p>
-            <a:fld id="{CE5E9CC1-C706-0F49-92D6-E571CC5EEA8F}" type="slidenum">
-              <a:rPr lang="en-US"/>
-              <a:t>‹#›</a:t>
-            </a:fld>
-            <a:endParaRPr lang="en-US"/>
-          </a:p>
-        </p:txBody>
-      </p:sp>
     </p:spTree>
     <p:extLst>
       <p:ext uri="{BB962C8B-B14F-4D97-AF65-F5344CB8AC3E}">
-        <p14:creationId xmlns:p14="http://schemas.microsoft.com/office/powerpoint/2010/main" val="1024086991"/>
+        <p14:creationId xmlns:p14="http://schemas.microsoft.com/office/powerpoint/2010/main" val="2821091947"/>
       </p:ext>
     </p:extLst>
   </p:cSld>
@@ -508,10 +289,6 @@
           <a:bodyPr/>
           <a:lstStyle/>
           <a:p>
-            <a:r>
-              <a:rPr lang="en-US" dirty="0"/>
-              <a:t/>
-            </a:r>
             <a:endParaRPr lang="en-US" dirty="0"/>
           </a:p>
         </p:txBody>
@@ -596,10 +373,6 @@
           <a:bodyPr/>
           <a:lstStyle/>
           <a:p>
-            <a:r>
-              <a:rPr lang="en-US" dirty="0"/>
-              <a:t/>
-            </a:r>
             <a:endParaRPr lang="en-US" dirty="0"/>
           </a:p>
         </p:txBody>
@@ -684,10 +457,6 @@
           <a:bodyPr/>
           <a:lstStyle/>
           <a:p>
-            <a:r>
-              <a:rPr lang="en-US" dirty="0"/>
-              <a:t/>
-            </a:r>
             <a:endParaRPr lang="en-US" dirty="0"/>
           </a:p>
         </p:txBody>
@@ -772,10 +541,6 @@
           <a:bodyPr/>
           <a:lstStyle/>
           <a:p>
-            <a:r>
-              <a:rPr lang="en-US" dirty="0"/>
-              <a:t/>
-            </a:r>
             <a:endParaRPr lang="en-US" dirty="0"/>
           </a:p>
         </p:txBody>
@@ -860,10 +625,6 @@
           <a:bodyPr/>
           <a:lstStyle/>
           <a:p>
-            <a:r>
-              <a:rPr lang="en-US" dirty="0"/>
-              <a:t/>
-            </a:r>
             <a:endParaRPr lang="en-US" dirty="0"/>
           </a:p>
         </p:txBody>
@@ -948,10 +709,6 @@
           <a:bodyPr/>
           <a:lstStyle/>
           <a:p>
-            <a:r>
-              <a:rPr lang="en-US" dirty="0"/>
-              <a:t/>
-            </a:r>
             <a:endParaRPr lang="en-US" dirty="0"/>
           </a:p>
         </p:txBody>
@@ -1036,10 +793,6 @@
           <a:bodyPr/>
           <a:lstStyle/>
           <a:p>
-            <a:r>
-              <a:rPr lang="en-US" dirty="0"/>
-              <a:t/>
-            </a:r>
             <a:endParaRPr lang="en-US" dirty="0"/>
           </a:p>
         </p:txBody>
@@ -1124,10 +877,6 @@
           <a:bodyPr/>
           <a:lstStyle/>
           <a:p>
-            <a:r>
-              <a:rPr lang="en-US" dirty="0"/>
-              <a:t/>
-            </a:r>
             <a:endParaRPr lang="en-US" dirty="0"/>
           </a:p>
         </p:txBody>
@@ -1212,10 +961,6 @@
           <a:bodyPr/>
           <a:lstStyle/>
           <a:p>
-            <a:r>
-              <a:rPr lang="en-US" dirty="0"/>
-              <a:t/>
-            </a:r>
             <a:endParaRPr lang="en-US" dirty="0"/>
           </a:p>
         </p:txBody>
@@ -1289,6 +1034,11 @@
 <file path=ppt/slideMasters/slideMaster1.xml><?xml version="1.0" encoding="utf-8"?>
 <p:sldMaster xmlns:a="http://schemas.openxmlformats.org/drawingml/2006/main" xmlns:r="http://schemas.openxmlformats.org/officeDocument/2006/relationships" xmlns:p="http://schemas.openxmlformats.org/presentationml/2006/main">
   <p:cSld>
+    <p:bg>
+      <p:bgRef idx="1001">
+        <a:schemeClr val="bg1"/>
+      </p:bgRef>
+    </p:bg>
     <p:spTree>
       <p:nvGrpSpPr>
         <p:cNvPr id="1" name=""/>
@@ -1571,6 +1321,7 @@
         <a:solidFill>
           <a:srgbClr val="1E3A5F"/>
         </a:solidFill>
+        <a:effectLst/>
       </p:bgPr>
     </p:bg>
     <p:spTree>
@@ -1611,6 +1362,13 @@
             <a:prstDash val="solid"/>
           </a:ln>
         </p:spPr>
+        <p:txBody>
+          <a:bodyPr/>
+          <a:lstStyle/>
+          <a:p>
+            <a:endParaRPr lang="en-LB"/>
+          </a:p>
+        </p:txBody>
       </p:sp>
       <p:sp>
         <p:nvSpPr>
@@ -1633,7 +1391,7 @@
           <a:bodyPr wrap="square" rtlCol="0" anchor="t"/>
           <a:lstStyle/>
           <a:p>
-            <a:pPr indent="0" marL="0">
+            <a:pPr marL="0" indent="0">
               <a:buNone/>
             </a:pPr>
             <a:r>
@@ -1650,7 +1408,7 @@
             <a:endParaRPr lang="en-US" sz="4200" dirty="0"/>
           </a:p>
           <a:p>
-            <a:pPr indent="0" marL="0">
+            <a:pPr marL="0" indent="0">
               <a:buNone/>
             </a:pPr>
             <a:r>
@@ -1689,7 +1447,7 @@
           <a:bodyPr wrap="square" rtlCol="0" anchor="ctr"/>
           <a:lstStyle/>
           <a:p>
-            <a:pPr indent="0" marL="0">
+            <a:pPr marL="0" indent="0">
               <a:buNone/>
             </a:pPr>
             <a:r>
@@ -1731,6 +1489,13 @@
             <a:prstDash val="solid"/>
           </a:ln>
         </p:spPr>
+        <p:txBody>
+          <a:bodyPr/>
+          <a:lstStyle/>
+          <a:p>
+            <a:endParaRPr lang="en-LB"/>
+          </a:p>
+        </p:txBody>
       </p:sp>
       <p:sp>
         <p:nvSpPr>
@@ -1753,7 +1518,7 @@
           <a:bodyPr wrap="square" rtlCol="0" anchor="ctr"/>
           <a:lstStyle/>
           <a:p>
-            <a:pPr indent="0" marL="0">
+            <a:pPr marL="0" indent="0">
               <a:buNone/>
             </a:pPr>
             <a:r>
@@ -1765,12 +1530,12 @@
                 <a:ea typeface="Calibri" pitchFamily="34" charset="-122"/>
                 <a:cs typeface="Calibri" pitchFamily="34" charset="-120"/>
               </a:rPr>
-              <a:t>Daniel Wehde &amp; Rami Aabed</a:t>
+              <a:t>Daniel Wehbe &amp; Rami Aabed</a:t>
             </a:r>
             <a:endParaRPr lang="en-US" sz="1400" dirty="0"/>
           </a:p>
           <a:p>
-            <a:pPr indent="0" marL="0">
+            <a:pPr marL="0" indent="0">
               <a:buNone/>
             </a:pPr>
             <a:r>
@@ -1812,6 +1577,13 @@
             <a:prstDash val="solid"/>
           </a:ln>
         </p:spPr>
+        <p:txBody>
+          <a:bodyPr/>
+          <a:lstStyle/>
+          <a:p>
+            <a:endParaRPr lang="en-LB"/>
+          </a:p>
+        </p:txBody>
       </p:sp>
       <p:sp>
         <p:nvSpPr>
@@ -1837,13 +1609,20 @@
             <a:prstDash val="solid"/>
           </a:ln>
           <a:effectLst>
-            <a:outerShdw sx="100000" sy="100000" kx="0" ky="0" algn="bl" rotWithShape="0" blurRad="101600" dist="38100" dir="8100000">
+            <a:outerShdw blurRad="101600" dist="38100" dir="8100000" algn="bl" rotWithShape="0">
               <a:srgbClr val="000000">
                 <a:alpha val="12000"/>
               </a:srgbClr>
             </a:outerShdw>
           </a:effectLst>
         </p:spPr>
+        <p:txBody>
+          <a:bodyPr/>
+          <a:lstStyle/>
+          <a:p>
+            <a:endParaRPr lang="en-LB"/>
+          </a:p>
+        </p:txBody>
       </p:sp>
       <p:sp>
         <p:nvSpPr>
@@ -1866,7 +1645,7 @@
           <a:bodyPr wrap="square" rtlCol="0" anchor="ctr"/>
           <a:lstStyle/>
           <a:p>
-            <a:pPr algn="ctr" indent="0" marL="0">
+            <a:pPr marL="0" indent="0" algn="ctr">
               <a:buNone/>
             </a:pPr>
             <a:r>
@@ -1908,13 +1687,20 @@
             <a:prstDash val="solid"/>
           </a:ln>
           <a:effectLst>
-            <a:outerShdw sx="100000" sy="100000" kx="0" ky="0" algn="bl" rotWithShape="0" blurRad="101600" dist="38100" dir="8100000">
+            <a:outerShdw blurRad="101600" dist="38100" dir="8100000" algn="bl" rotWithShape="0">
               <a:srgbClr val="000000">
                 <a:alpha val="12000"/>
               </a:srgbClr>
             </a:outerShdw>
           </a:effectLst>
         </p:spPr>
+        <p:txBody>
+          <a:bodyPr/>
+          <a:lstStyle/>
+          <a:p>
+            <a:endParaRPr lang="en-LB"/>
+          </a:p>
+        </p:txBody>
       </p:sp>
       <p:sp>
         <p:nvSpPr>
@@ -1937,7 +1723,7 @@
           <a:bodyPr wrap="square" rtlCol="0" anchor="ctr"/>
           <a:lstStyle/>
           <a:p>
-            <a:pPr algn="ctr" indent="0" marL="0">
+            <a:pPr marL="0" indent="0" algn="ctr">
               <a:buNone/>
             </a:pPr>
             <a:r>
@@ -1979,13 +1765,20 @@
             <a:prstDash val="solid"/>
           </a:ln>
           <a:effectLst>
-            <a:outerShdw sx="100000" sy="100000" kx="0" ky="0" algn="bl" rotWithShape="0" blurRad="101600" dist="38100" dir="8100000">
+            <a:outerShdw blurRad="101600" dist="38100" dir="8100000" algn="bl" rotWithShape="0">
               <a:srgbClr val="000000">
                 <a:alpha val="12000"/>
               </a:srgbClr>
             </a:outerShdw>
           </a:effectLst>
         </p:spPr>
+        <p:txBody>
+          <a:bodyPr/>
+          <a:lstStyle/>
+          <a:p>
+            <a:endParaRPr lang="en-LB"/>
+          </a:p>
+        </p:txBody>
       </p:sp>
       <p:sp>
         <p:nvSpPr>
@@ -2008,7 +1801,7 @@
           <a:bodyPr wrap="square" rtlCol="0" anchor="ctr"/>
           <a:lstStyle/>
           <a:p>
-            <a:pPr algn="ctr" indent="0" marL="0">
+            <a:pPr marL="0" indent="0" algn="ctr">
               <a:buNone/>
             </a:pPr>
             <a:r>
@@ -2042,6 +1835,7 @@
         <a:solidFill>
           <a:srgbClr val="F2F6FC"/>
         </a:solidFill>
+        <a:effectLst/>
       </p:bgPr>
     </p:bg>
     <p:spTree>
@@ -2082,6 +1876,13 @@
             <a:prstDash val="solid"/>
           </a:ln>
         </p:spPr>
+        <p:txBody>
+          <a:bodyPr/>
+          <a:lstStyle/>
+          <a:p>
+            <a:endParaRPr lang="en-LB"/>
+          </a:p>
+        </p:txBody>
       </p:sp>
       <p:sp>
         <p:nvSpPr>
@@ -2104,7 +1905,7 @@
           <a:bodyPr wrap="square" lIns="0" tIns="0" rIns="0" bIns="0" rtlCol="0" anchor="ctr"/>
           <a:lstStyle/>
           <a:p>
-            <a:pPr indent="0" marL="0">
+            <a:pPr marL="0" indent="0">
               <a:buNone/>
             </a:pPr>
             <a:r>
@@ -2146,6 +1947,13 @@
             <a:prstDash val="solid"/>
           </a:ln>
         </p:spPr>
+        <p:txBody>
+          <a:bodyPr/>
+          <a:lstStyle/>
+          <a:p>
+            <a:endParaRPr lang="en-LB"/>
+          </a:p>
+        </p:txBody>
       </p:sp>
       <p:sp>
         <p:nvSpPr>
@@ -2168,7 +1976,7 @@
           <a:bodyPr wrap="square" rtlCol="0" anchor="ctr"/>
           <a:lstStyle/>
           <a:p>
-            <a:pPr indent="0" marL="0">
+            <a:pPr marL="0" indent="0">
               <a:buNone/>
             </a:pPr>
             <a:r>
@@ -2207,7 +2015,7 @@
           <a:bodyPr wrap="square" rtlCol="0" anchor="t"/>
           <a:lstStyle/>
           <a:p>
-            <a:pPr indent="0" marL="0">
+            <a:pPr marL="0" indent="0">
               <a:buNone/>
             </a:pPr>
             <a:r>
@@ -2224,13 +2032,13 @@
             <a:endParaRPr lang="en-US" sz="1350" dirty="0"/>
           </a:p>
           <a:p>
-            <a:pPr indent="0" marL="0">
+            <a:pPr marL="0" indent="0">
               <a:buNone/>
             </a:pPr>
             <a:endParaRPr lang="en-US" sz="1350" dirty="0"/>
           </a:p>
           <a:p>
-            <a:pPr indent="0" marL="0">
+            <a:pPr marL="0" indent="0">
               <a:buNone/>
             </a:pPr>
             <a:r>
@@ -2242,7 +2050,7 @@
                 <a:ea typeface="Calibri" pitchFamily="34" charset="-122"/>
                 <a:cs typeface="Calibri" pitchFamily="34" charset="-120"/>
               </a:rPr>
-              <a:t>This is a binary text classification task — one of the most fundamental problems in Natural Language Processing.</a:t>
+              <a:t>This is a binary text classification task: one of the most fundamental problems in Natural Language Processing.</a:t>
             </a:r>
             <a:endParaRPr lang="en-US" sz="1350" dirty="0"/>
           </a:p>
@@ -2269,7 +2077,7 @@
           <a:bodyPr wrap="square" rtlCol="0" anchor="ctr"/>
           <a:lstStyle/>
           <a:p>
-            <a:pPr indent="0" marL="0">
+            <a:pPr marL="0" indent="0">
               <a:buNone/>
             </a:pPr>
             <a:r>
@@ -2405,13 +2213,20 @@
             <a:prstDash val="solid"/>
           </a:ln>
           <a:effectLst>
-            <a:outerShdw sx="100000" sy="100000" kx="0" ky="0" algn="bl" rotWithShape="0" blurRad="101600" dist="38100" dir="8100000">
+            <a:outerShdw blurRad="101600" dist="38100" dir="8100000" algn="bl" rotWithShape="0">
               <a:srgbClr val="000000">
                 <a:alpha val="12000"/>
               </a:srgbClr>
             </a:outerShdw>
           </a:effectLst>
         </p:spPr>
+        <p:txBody>
+          <a:bodyPr/>
+          <a:lstStyle/>
+          <a:p>
+            <a:endParaRPr lang="en-LB"/>
+          </a:p>
+        </p:txBody>
       </p:sp>
       <p:sp>
         <p:nvSpPr>
@@ -2434,7 +2249,7 @@
           <a:bodyPr wrap="square" rtlCol="0" anchor="ctr"/>
           <a:lstStyle/>
           <a:p>
-            <a:pPr algn="ctr" indent="0" marL="0">
+            <a:pPr marL="0" indent="0" algn="ctr">
               <a:buNone/>
             </a:pPr>
             <a:r>
@@ -2476,6 +2291,13 @@
             <a:prstDash val="solid"/>
           </a:ln>
         </p:spPr>
+        <p:txBody>
+          <a:bodyPr/>
+          <a:lstStyle/>
+          <a:p>
+            <a:endParaRPr lang="en-LB"/>
+          </a:p>
+        </p:txBody>
       </p:sp>
       <p:sp>
         <p:nvSpPr>
@@ -2498,7 +2320,7 @@
           <a:bodyPr wrap="square" rtlCol="0" anchor="ctr"/>
           <a:lstStyle/>
           <a:p>
-            <a:pPr algn="ctr" indent="0" marL="0">
+            <a:pPr marL="0" indent="0" algn="ctr">
               <a:buNone/>
             </a:pPr>
             <a:r>
@@ -2537,7 +2359,7 @@
           <a:bodyPr wrap="square" rtlCol="0" anchor="ctr"/>
           <a:lstStyle/>
           <a:p>
-            <a:pPr algn="ctr" indent="0" marL="0">
+            <a:pPr marL="0" indent="0" algn="ctr">
               <a:buNone/>
             </a:pPr>
             <a:r>
@@ -2579,6 +2401,13 @@
             <a:prstDash val="solid"/>
           </a:ln>
         </p:spPr>
+        <p:txBody>
+          <a:bodyPr/>
+          <a:lstStyle/>
+          <a:p>
+            <a:endParaRPr lang="en-LB"/>
+          </a:p>
+        </p:txBody>
       </p:sp>
       <p:sp>
         <p:nvSpPr>
@@ -2601,7 +2430,7 @@
           <a:bodyPr wrap="square" rtlCol="0" anchor="ctr"/>
           <a:lstStyle/>
           <a:p>
-            <a:pPr algn="ctr" indent="0" marL="0">
+            <a:pPr marL="0" indent="0" algn="ctr">
               <a:buNone/>
             </a:pPr>
             <a:r>
@@ -2640,7 +2469,7 @@
           <a:bodyPr wrap="square" rtlCol="0" anchor="ctr"/>
           <a:lstStyle/>
           <a:p>
-            <a:pPr algn="ctr" indent="0" marL="0">
+            <a:pPr marL="0" indent="0" algn="ctr">
               <a:buNone/>
             </a:pPr>
             <a:r>
@@ -2682,6 +2511,13 @@
             <a:prstDash val="solid"/>
           </a:ln>
         </p:spPr>
+        <p:txBody>
+          <a:bodyPr/>
+          <a:lstStyle/>
+          <a:p>
+            <a:endParaRPr lang="en-LB"/>
+          </a:p>
+        </p:txBody>
       </p:sp>
       <p:sp>
         <p:nvSpPr>
@@ -2704,7 +2540,7 @@
           <a:bodyPr wrap="square" rtlCol="0" anchor="ctr"/>
           <a:lstStyle/>
           <a:p>
-            <a:pPr algn="ctr" indent="0" marL="0">
+            <a:pPr marL="0" indent="0" algn="ctr">
               <a:buNone/>
             </a:pPr>
             <a:r>
@@ -2743,7 +2579,7 @@
           <a:bodyPr wrap="square" rtlCol="0" anchor="ctr"/>
           <a:lstStyle/>
           <a:p>
-            <a:pPr algn="ctr" indent="0" marL="0">
+            <a:pPr marL="0" indent="0" algn="ctr">
               <a:buNone/>
             </a:pPr>
             <a:r>
@@ -2782,7 +2618,7 @@
           <a:bodyPr wrap="square" rtlCol="0" anchor="ctr"/>
           <a:lstStyle/>
           <a:p>
-            <a:pPr algn="ctr" indent="0" marL="0">
+            <a:pPr marL="0" indent="0" algn="ctr">
               <a:buNone/>
             </a:pPr>
             <a:r>
@@ -2816,6 +2652,7 @@
         <a:solidFill>
           <a:srgbClr val="F2F6FC"/>
         </a:solidFill>
+        <a:effectLst/>
       </p:bgPr>
     </p:bg>
     <p:spTree>
@@ -2856,6 +2693,13 @@
             <a:prstDash val="solid"/>
           </a:ln>
         </p:spPr>
+        <p:txBody>
+          <a:bodyPr/>
+          <a:lstStyle/>
+          <a:p>
+            <a:endParaRPr lang="en-LB"/>
+          </a:p>
+        </p:txBody>
       </p:sp>
       <p:sp>
         <p:nvSpPr>
@@ -2878,7 +2722,7 @@
           <a:bodyPr wrap="square" lIns="0" tIns="0" rIns="0" bIns="0" rtlCol="0" anchor="ctr"/>
           <a:lstStyle/>
           <a:p>
-            <a:pPr indent="0" marL="0">
+            <a:pPr marL="0" indent="0">
               <a:buNone/>
             </a:pPr>
             <a:r>
@@ -2920,6 +2764,13 @@
             <a:prstDash val="solid"/>
           </a:ln>
         </p:spPr>
+        <p:txBody>
+          <a:bodyPr/>
+          <a:lstStyle/>
+          <a:p>
+            <a:endParaRPr lang="en-LB"/>
+          </a:p>
+        </p:txBody>
       </p:sp>
       <p:sp>
         <p:nvSpPr>
@@ -2945,13 +2796,20 @@
             <a:prstDash val="solid"/>
           </a:ln>
           <a:effectLst>
-            <a:outerShdw sx="100000" sy="100000" kx="0" ky="0" algn="bl" rotWithShape="0" blurRad="101600" dist="38100" dir="8100000">
+            <a:outerShdw blurRad="101600" dist="38100" dir="8100000" algn="bl" rotWithShape="0">
               <a:srgbClr val="000000">
                 <a:alpha val="12000"/>
               </a:srgbClr>
             </a:outerShdw>
           </a:effectLst>
         </p:spPr>
+        <p:txBody>
+          <a:bodyPr/>
+          <a:lstStyle/>
+          <a:p>
+            <a:endParaRPr lang="en-LB"/>
+          </a:p>
+        </p:txBody>
       </p:sp>
       <p:sp>
         <p:nvSpPr>
@@ -2974,7 +2832,7 @@
           <a:bodyPr wrap="square" rtlCol="0" anchor="ctr"/>
           <a:lstStyle/>
           <a:p>
-            <a:pPr algn="ctr" indent="0" marL="0">
+            <a:pPr marL="0" indent="0" algn="ctr">
               <a:buNone/>
             </a:pPr>
             <a:r>
@@ -3013,7 +2871,7 @@
           <a:bodyPr wrap="square" rtlCol="0" anchor="ctr"/>
           <a:lstStyle/>
           <a:p>
-            <a:pPr algn="ctr" indent="0" marL="0">
+            <a:pPr marL="0" indent="0" algn="ctr">
               <a:buNone/>
             </a:pPr>
             <a:r>
@@ -3055,13 +2913,20 @@
             <a:prstDash val="solid"/>
           </a:ln>
           <a:effectLst>
-            <a:outerShdw sx="100000" sy="100000" kx="0" ky="0" algn="bl" rotWithShape="0" blurRad="101600" dist="38100" dir="8100000">
+            <a:outerShdw blurRad="101600" dist="38100" dir="8100000" algn="bl" rotWithShape="0">
               <a:srgbClr val="000000">
                 <a:alpha val="12000"/>
               </a:srgbClr>
             </a:outerShdw>
           </a:effectLst>
         </p:spPr>
+        <p:txBody>
+          <a:bodyPr/>
+          <a:lstStyle/>
+          <a:p>
+            <a:endParaRPr lang="en-LB"/>
+          </a:p>
+        </p:txBody>
       </p:sp>
       <p:sp>
         <p:nvSpPr>
@@ -3084,7 +2949,7 @@
           <a:bodyPr wrap="square" rtlCol="0" anchor="ctr"/>
           <a:lstStyle/>
           <a:p>
-            <a:pPr algn="ctr" indent="0" marL="0">
+            <a:pPr marL="0" indent="0" algn="ctr">
               <a:buNone/>
             </a:pPr>
             <a:r>
@@ -3123,7 +2988,7 @@
           <a:bodyPr wrap="square" rtlCol="0" anchor="ctr"/>
           <a:lstStyle/>
           <a:p>
-            <a:pPr algn="ctr" indent="0" marL="0">
+            <a:pPr marL="0" indent="0" algn="ctr">
               <a:buNone/>
             </a:pPr>
             <a:r>
@@ -3165,13 +3030,20 @@
             <a:prstDash val="solid"/>
           </a:ln>
           <a:effectLst>
-            <a:outerShdw sx="100000" sy="100000" kx="0" ky="0" algn="bl" rotWithShape="0" blurRad="101600" dist="38100" dir="8100000">
+            <a:outerShdw blurRad="101600" dist="38100" dir="8100000" algn="bl" rotWithShape="0">
               <a:srgbClr val="000000">
                 <a:alpha val="12000"/>
               </a:srgbClr>
             </a:outerShdw>
           </a:effectLst>
         </p:spPr>
+        <p:txBody>
+          <a:bodyPr/>
+          <a:lstStyle/>
+          <a:p>
+            <a:endParaRPr lang="en-LB"/>
+          </a:p>
+        </p:txBody>
       </p:sp>
       <p:sp>
         <p:nvSpPr>
@@ -3194,7 +3066,7 @@
           <a:bodyPr wrap="square" rtlCol="0" anchor="ctr"/>
           <a:lstStyle/>
           <a:p>
-            <a:pPr algn="ctr" indent="0" marL="0">
+            <a:pPr marL="0" indent="0" algn="ctr">
               <a:buNone/>
             </a:pPr>
             <a:r>
@@ -3233,7 +3105,7 @@
           <a:bodyPr wrap="square" rtlCol="0" anchor="ctr"/>
           <a:lstStyle/>
           <a:p>
-            <a:pPr algn="ctr" indent="0" marL="0">
+            <a:pPr marL="0" indent="0" algn="ctr">
               <a:buNone/>
             </a:pPr>
             <a:r>
@@ -3272,7 +3144,7 @@
           <a:bodyPr wrap="square" rtlCol="0" anchor="ctr"/>
           <a:lstStyle/>
           <a:p>
-            <a:pPr indent="0" marL="0">
+            <a:pPr marL="0" indent="0">
               <a:buNone/>
             </a:pPr>
             <a:r>
@@ -3292,7 +3164,7 @@
       </p:sp>
       <p:graphicFrame>
         <p:nvGraphicFramePr>
-          <p:cNvPr id="4" name="Table 0"/>
+          <p:cNvPr id="15" name="Table 0"/>
           <p:cNvGraphicFramePr>
             <a:graphicFrameLocks noGrp="1"/>
           </p:cNvGraphicFramePr>
@@ -3313,9 +3185,27 @@
             <a:tbl>
               <a:tblPr/>
               <a:tblGrid>
-                <a:gridCol w="1645920"/>
-                <a:gridCol w="1463040"/>
-                <a:gridCol w="1463040"/>
+                <a:gridCol w="1645920">
+                  <a:extLst>
+                    <a:ext uri="{9D8B030D-6E8A-4147-A177-3AD203B41FA5}">
+                      <a16:colId xmlns:a16="http://schemas.microsoft.com/office/drawing/2014/main" val="20000"/>
+                    </a:ext>
+                  </a:extLst>
+                </a:gridCol>
+                <a:gridCol w="1463040">
+                  <a:extLst>
+                    <a:ext uri="{9D8B030D-6E8A-4147-A177-3AD203B41FA5}">
+                      <a16:colId xmlns:a16="http://schemas.microsoft.com/office/drawing/2014/main" val="20001"/>
+                    </a:ext>
+                  </a:extLst>
+                </a:gridCol>
+                <a:gridCol w="1463040">
+                  <a:extLst>
+                    <a:ext uri="{9D8B030D-6E8A-4147-A177-3AD203B41FA5}">
+                      <a16:colId xmlns:a16="http://schemas.microsoft.com/office/drawing/2014/main" val="20002"/>
+                    </a:ext>
+                  </a:extLst>
+                </a:gridCol>
               </a:tblGrid>
               <a:tr h="365760">
                 <a:tc>
@@ -3323,7 +3213,7 @@
                     <a:bodyPr/>
                     <a:lstStyle/>
                     <a:p>
-                      <a:pPr algn="ctr" indent="0" marL="0">
+                      <a:pPr marL="0" indent="0" algn="ctr">
                         <a:buNone/>
                       </a:pPr>
                       <a:r>
@@ -3344,7 +3234,7 @@
                       </a:endParaRPr>
                     </a:p>
                   </a:txBody>
-                  <a:tcPr marL="91440" marR="91440" marT="45720" marB="45720">
+                  <a:tcPr>
                     <a:lnL w="12700" cap="flat" cmpd="sng" algn="ctr">
                       <a:solidFill>
                         <a:srgbClr val="D1D5DB"/>
@@ -3391,7 +3281,7 @@
                     <a:bodyPr/>
                     <a:lstStyle/>
                     <a:p>
-                      <a:pPr algn="ctr" indent="0" marL="0">
+                      <a:pPr marL="0" indent="0" algn="ctr">
                         <a:buNone/>
                       </a:pPr>
                       <a:r>
@@ -3412,7 +3302,7 @@
                       </a:endParaRPr>
                     </a:p>
                   </a:txBody>
-                  <a:tcPr marL="91440" marR="91440" marT="45720" marB="45720">
+                  <a:tcPr>
                     <a:lnL w="12700" cap="flat" cmpd="sng" algn="ctr">
                       <a:solidFill>
                         <a:srgbClr val="D1D5DB"/>
@@ -3459,7 +3349,7 @@
                     <a:bodyPr/>
                     <a:lstStyle/>
                     <a:p>
-                      <a:pPr algn="ctr" indent="0" marL="0">
+                      <a:pPr marL="0" indent="0" algn="ctr">
                         <a:buNone/>
                       </a:pPr>
                       <a:r>
@@ -3480,7 +3370,7 @@
                       </a:endParaRPr>
                     </a:p>
                   </a:txBody>
-                  <a:tcPr marL="91440" marR="91440" marT="45720" marB="45720">
+                  <a:tcPr>
                     <a:lnL w="12700" cap="flat" cmpd="sng" algn="ctr">
                       <a:solidFill>
                         <a:srgbClr val="D1D5DB"/>
@@ -3522,6 +3412,11 @@
                     </a:solidFill>
                   </a:tcPr>
                 </a:tc>
+                <a:extLst>
+                  <a:ext uri="{0D108BD9-81ED-4DB2-BD59-A6C34878D82A}">
+                    <a16:rowId xmlns:a16="http://schemas.microsoft.com/office/drawing/2014/main" val="10000"/>
+                  </a:ext>
+                </a:extLst>
               </a:tr>
               <a:tr h="365760">
                 <a:tc>
@@ -3529,7 +3424,7 @@
                     <a:bodyPr/>
                     <a:lstStyle/>
                     <a:p>
-                      <a:pPr algn="ctr" indent="0" marL="0">
+                      <a:pPr marL="0" indent="0" algn="ctr">
                         <a:buNone/>
                       </a:pPr>
                       <a:r>
@@ -3550,7 +3445,7 @@
                       </a:endParaRPr>
                     </a:p>
                   </a:txBody>
-                  <a:tcPr marL="91440" marR="91440" marT="45720" marB="45720">
+                  <a:tcPr>
                     <a:lnL w="12700" cap="flat" cmpd="sng" algn="ctr">
                       <a:solidFill>
                         <a:srgbClr val="D1D5DB"/>
@@ -3594,7 +3489,7 @@
                     <a:bodyPr/>
                     <a:lstStyle/>
                     <a:p>
-                      <a:pPr algn="ctr" indent="0" marL="0">
+                      <a:pPr marL="0" indent="0" algn="ctr">
                         <a:buNone/>
                       </a:pPr>
                       <a:r>
@@ -3615,7 +3510,7 @@
                       </a:endParaRPr>
                     </a:p>
                   </a:txBody>
-                  <a:tcPr marL="91440" marR="91440" marT="45720" marB="45720">
+                  <a:tcPr>
                     <a:lnL w="12700" cap="flat" cmpd="sng" algn="ctr">
                       <a:solidFill>
                         <a:srgbClr val="D1D5DB"/>
@@ -3659,7 +3554,7 @@
                     <a:bodyPr/>
                     <a:lstStyle/>
                     <a:p>
-                      <a:pPr algn="ctr" indent="0" marL="0">
+                      <a:pPr marL="0" indent="0" algn="ctr">
                         <a:buNone/>
                       </a:pPr>
                       <a:r>
@@ -3680,7 +3575,7 @@
                       </a:endParaRPr>
                     </a:p>
                   </a:txBody>
-                  <a:tcPr marL="91440" marR="91440" marT="45720" marB="45720">
+                  <a:tcPr>
                     <a:lnL w="12700" cap="flat" cmpd="sng" algn="ctr">
                       <a:solidFill>
                         <a:srgbClr val="D1D5DB"/>
@@ -3719,6 +3614,11 @@
                     </a:lnB>
                   </a:tcPr>
                 </a:tc>
+                <a:extLst>
+                  <a:ext uri="{0D108BD9-81ED-4DB2-BD59-A6C34878D82A}">
+                    <a16:rowId xmlns:a16="http://schemas.microsoft.com/office/drawing/2014/main" val="10001"/>
+                  </a:ext>
+                </a:extLst>
               </a:tr>
               <a:tr h="365760">
                 <a:tc>
@@ -3726,7 +3626,7 @@
                     <a:bodyPr/>
                     <a:lstStyle/>
                     <a:p>
-                      <a:pPr algn="ctr" indent="0" marL="0">
+                      <a:pPr marL="0" indent="0" algn="ctr">
                         <a:buNone/>
                       </a:pPr>
                       <a:r>
@@ -3747,7 +3647,7 @@
                       </a:endParaRPr>
                     </a:p>
                   </a:txBody>
-                  <a:tcPr marL="91440" marR="91440" marT="45720" marB="45720">
+                  <a:tcPr>
                     <a:lnL w="12700" cap="flat" cmpd="sng" algn="ctr">
                       <a:solidFill>
                         <a:srgbClr val="D1D5DB"/>
@@ -3791,7 +3691,7 @@
                     <a:bodyPr/>
                     <a:lstStyle/>
                     <a:p>
-                      <a:pPr algn="ctr" indent="0" marL="0">
+                      <a:pPr marL="0" indent="0" algn="ctr">
                         <a:buNone/>
                       </a:pPr>
                       <a:r>
@@ -3812,7 +3712,7 @@
                       </a:endParaRPr>
                     </a:p>
                   </a:txBody>
-                  <a:tcPr marL="91440" marR="91440" marT="45720" marB="45720">
+                  <a:tcPr>
                     <a:lnL w="12700" cap="flat" cmpd="sng" algn="ctr">
                       <a:solidFill>
                         <a:srgbClr val="D1D5DB"/>
@@ -3856,7 +3756,7 @@
                     <a:bodyPr/>
                     <a:lstStyle/>
                     <a:p>
-                      <a:pPr algn="ctr" indent="0" marL="0">
+                      <a:pPr marL="0" indent="0" algn="ctr">
                         <a:buNone/>
                       </a:pPr>
                       <a:r>
@@ -3877,7 +3777,7 @@
                       </a:endParaRPr>
                     </a:p>
                   </a:txBody>
-                  <a:tcPr marL="91440" marR="91440" marT="45720" marB="45720">
+                  <a:tcPr>
                     <a:lnL w="12700" cap="flat" cmpd="sng" algn="ctr">
                       <a:solidFill>
                         <a:srgbClr val="D1D5DB"/>
@@ -3916,6 +3816,11 @@
                     </a:lnB>
                   </a:tcPr>
                 </a:tc>
+                <a:extLst>
+                  <a:ext uri="{0D108BD9-81ED-4DB2-BD59-A6C34878D82A}">
+                    <a16:rowId xmlns:a16="http://schemas.microsoft.com/office/drawing/2014/main" val="10002"/>
+                  </a:ext>
+                </a:extLst>
               </a:tr>
               <a:tr h="365760">
                 <a:tc>
@@ -3923,7 +3828,7 @@
                     <a:bodyPr/>
                     <a:lstStyle/>
                     <a:p>
-                      <a:pPr algn="ctr" indent="0" marL="0">
+                      <a:pPr marL="0" indent="0" algn="ctr">
                         <a:buNone/>
                       </a:pPr>
                       <a:r>
@@ -3944,7 +3849,7 @@
                       </a:endParaRPr>
                     </a:p>
                   </a:txBody>
-                  <a:tcPr marL="91440" marR="91440" marT="45720" marB="45720">
+                  <a:tcPr>
                     <a:lnL w="12700" cap="flat" cmpd="sng" algn="ctr">
                       <a:solidFill>
                         <a:srgbClr val="D1D5DB"/>
@@ -3988,7 +3893,7 @@
                     <a:bodyPr/>
                     <a:lstStyle/>
                     <a:p>
-                      <a:pPr algn="ctr" indent="0" marL="0">
+                      <a:pPr marL="0" indent="0" algn="ctr">
                         <a:buNone/>
                       </a:pPr>
                       <a:r>
@@ -4009,7 +3914,7 @@
                       </a:endParaRPr>
                     </a:p>
                   </a:txBody>
-                  <a:tcPr marL="91440" marR="91440" marT="45720" marB="45720">
+                  <a:tcPr>
                     <a:lnL w="12700" cap="flat" cmpd="sng" algn="ctr">
                       <a:solidFill>
                         <a:srgbClr val="D1D5DB"/>
@@ -4053,7 +3958,7 @@
                     <a:bodyPr/>
                     <a:lstStyle/>
                     <a:p>
-                      <a:pPr algn="ctr" indent="0" marL="0">
+                      <a:pPr marL="0" indent="0" algn="ctr">
                         <a:buNone/>
                       </a:pPr>
                       <a:r>
@@ -4074,7 +3979,7 @@
                       </a:endParaRPr>
                     </a:p>
                   </a:txBody>
-                  <a:tcPr marL="91440" marR="91440" marT="45720" marB="45720">
+                  <a:tcPr>
                     <a:lnL w="12700" cap="flat" cmpd="sng" algn="ctr">
                       <a:solidFill>
                         <a:srgbClr val="D1D5DB"/>
@@ -4113,6 +4018,11 @@
                     </a:lnB>
                   </a:tcPr>
                 </a:tc>
+                <a:extLst>
+                  <a:ext uri="{0D108BD9-81ED-4DB2-BD59-A6C34878D82A}">
+                    <a16:rowId xmlns:a16="http://schemas.microsoft.com/office/drawing/2014/main" val="10003"/>
+                  </a:ext>
+                </a:extLst>
               </a:tr>
             </a:tbl>
           </a:graphicData>
@@ -4142,13 +4052,20 @@
             <a:prstDash val="solid"/>
           </a:ln>
           <a:effectLst>
-            <a:outerShdw sx="100000" sy="100000" kx="0" ky="0" algn="bl" rotWithShape="0" blurRad="101600" dist="38100" dir="8100000">
+            <a:outerShdw blurRad="101600" dist="38100" dir="8100000" algn="bl" rotWithShape="0">
               <a:srgbClr val="000000">
                 <a:alpha val="12000"/>
               </a:srgbClr>
             </a:outerShdw>
           </a:effectLst>
         </p:spPr>
+        <p:txBody>
+          <a:bodyPr/>
+          <a:lstStyle/>
+          <a:p>
+            <a:endParaRPr lang="en-LB"/>
+          </a:p>
+        </p:txBody>
       </p:sp>
       <p:sp>
         <p:nvSpPr>
@@ -4174,6 +4091,13 @@
             <a:prstDash val="solid"/>
           </a:ln>
         </p:spPr>
+        <p:txBody>
+          <a:bodyPr/>
+          <a:lstStyle/>
+          <a:p>
+            <a:endParaRPr lang="en-LB"/>
+          </a:p>
+        </p:txBody>
       </p:sp>
       <p:sp>
         <p:nvSpPr>
@@ -4196,7 +4120,7 @@
           <a:bodyPr wrap="square" rtlCol="0" anchor="ctr"/>
           <a:lstStyle/>
           <a:p>
-            <a:pPr indent="0" marL="0">
+            <a:pPr marL="0" indent="0">
               <a:buNone/>
             </a:pPr>
             <a:r>
@@ -4235,7 +4159,7 @@
           <a:bodyPr wrap="square" rtlCol="0" anchor="ctr"/>
           <a:lstStyle/>
           <a:p>
-            <a:pPr indent="0" marL="0">
+            <a:pPr marL="0" indent="0">
               <a:buNone/>
             </a:pPr>
             <a:r>
@@ -4368,7 +4292,7 @@
           <a:bodyPr wrap="square" rtlCol="0" anchor="ctr"/>
           <a:lstStyle/>
           <a:p>
-            <a:pPr indent="0" marL="0">
+            <a:pPr marL="0" indent="0">
               <a:buNone/>
             </a:pPr>
             <a:r>
@@ -4478,6 +4402,7 @@
         <a:solidFill>
           <a:srgbClr val="F2F6FC"/>
         </a:solidFill>
+        <a:effectLst/>
       </p:bgPr>
     </p:bg>
     <p:spTree>
@@ -4518,6 +4443,13 @@
             <a:prstDash val="solid"/>
           </a:ln>
         </p:spPr>
+        <p:txBody>
+          <a:bodyPr/>
+          <a:lstStyle/>
+          <a:p>
+            <a:endParaRPr lang="en-LB"/>
+          </a:p>
+        </p:txBody>
       </p:sp>
       <p:sp>
         <p:nvSpPr>
@@ -4540,7 +4472,7 @@
           <a:bodyPr wrap="square" lIns="0" tIns="0" rIns="0" bIns="0" rtlCol="0" anchor="ctr"/>
           <a:lstStyle/>
           <a:p>
-            <a:pPr indent="0" marL="0">
+            <a:pPr marL="0" indent="0">
               <a:buNone/>
             </a:pPr>
             <a:r>
@@ -4582,6 +4514,13 @@
             <a:prstDash val="solid"/>
           </a:ln>
         </p:spPr>
+        <p:txBody>
+          <a:bodyPr/>
+          <a:lstStyle/>
+          <a:p>
+            <a:endParaRPr lang="en-LB"/>
+          </a:p>
+        </p:txBody>
       </p:sp>
       <p:sp>
         <p:nvSpPr>
@@ -4607,13 +4546,20 @@
             <a:prstDash val="solid"/>
           </a:ln>
           <a:effectLst>
-            <a:outerShdw sx="100000" sy="100000" kx="0" ky="0" algn="bl" rotWithShape="0" blurRad="101600" dist="38100" dir="8100000">
+            <a:outerShdw blurRad="101600" dist="38100" dir="8100000" algn="bl" rotWithShape="0">
               <a:srgbClr val="000000">
                 <a:alpha val="12000"/>
               </a:srgbClr>
             </a:outerShdw>
           </a:effectLst>
         </p:spPr>
+        <p:txBody>
+          <a:bodyPr/>
+          <a:lstStyle/>
+          <a:p>
+            <a:endParaRPr lang="en-LB"/>
+          </a:p>
+        </p:txBody>
       </p:sp>
       <p:sp>
         <p:nvSpPr>
@@ -4639,6 +4585,13 @@
             <a:prstDash val="solid"/>
           </a:ln>
         </p:spPr>
+        <p:txBody>
+          <a:bodyPr/>
+          <a:lstStyle/>
+          <a:p>
+            <a:endParaRPr lang="en-LB"/>
+          </a:p>
+        </p:txBody>
       </p:sp>
       <p:sp>
         <p:nvSpPr>
@@ -4661,7 +4614,7 @@
           <a:bodyPr wrap="square" rtlCol="0" anchor="ctr"/>
           <a:lstStyle/>
           <a:p>
-            <a:pPr algn="ctr" indent="0" marL="0">
+            <a:pPr marL="0" indent="0" algn="ctr">
               <a:buNone/>
             </a:pPr>
             <a:r>
@@ -4700,7 +4653,7 @@
           <a:bodyPr wrap="square" rtlCol="0" anchor="ctr"/>
           <a:lstStyle/>
           <a:p>
-            <a:pPr algn="ctr" indent="0" marL="0">
+            <a:pPr marL="0" indent="0" algn="ctr">
               <a:buNone/>
             </a:pPr>
             <a:r>
@@ -4746,6 +4699,13 @@
             <a:prstDash val="solid"/>
           </a:ln>
         </p:spPr>
+        <p:txBody>
+          <a:bodyPr/>
+          <a:lstStyle/>
+          <a:p>
+            <a:endParaRPr lang="en-LB"/>
+          </a:p>
+        </p:txBody>
       </p:sp>
       <p:sp>
         <p:nvSpPr>
@@ -4768,7 +4728,7 @@
           <a:bodyPr wrap="square" rtlCol="0" anchor="ctr"/>
           <a:lstStyle/>
           <a:p>
-            <a:pPr algn="ctr" indent="0" marL="0">
+            <a:pPr marL="0" indent="0" algn="ctr">
               <a:buNone/>
             </a:pPr>
             <a:r>
@@ -4814,6 +4774,13 @@
             <a:prstDash val="solid"/>
           </a:ln>
         </p:spPr>
+        <p:txBody>
+          <a:bodyPr/>
+          <a:lstStyle/>
+          <a:p>
+            <a:endParaRPr lang="en-LB"/>
+          </a:p>
+        </p:txBody>
       </p:sp>
       <p:sp>
         <p:nvSpPr>
@@ -4836,7 +4803,7 @@
           <a:bodyPr wrap="square" rtlCol="0" anchor="ctr"/>
           <a:lstStyle/>
           <a:p>
-            <a:pPr algn="ctr" indent="0" marL="0">
+            <a:pPr marL="0" indent="0" algn="ctr">
               <a:buNone/>
             </a:pPr>
             <a:r>
@@ -4882,6 +4849,13 @@
             <a:prstDash val="solid"/>
           </a:ln>
         </p:spPr>
+        <p:txBody>
+          <a:bodyPr/>
+          <a:lstStyle/>
+          <a:p>
+            <a:endParaRPr lang="en-LB"/>
+          </a:p>
+        </p:txBody>
       </p:sp>
       <p:sp>
         <p:nvSpPr>
@@ -4904,7 +4878,7 @@
           <a:bodyPr wrap="square" rtlCol="0" anchor="ctr"/>
           <a:lstStyle/>
           <a:p>
-            <a:pPr algn="ctr" indent="0" marL="0">
+            <a:pPr marL="0" indent="0" algn="ctr">
               <a:buNone/>
             </a:pPr>
             <a:r>
@@ -4950,6 +4924,13 @@
             <a:prstDash val="solid"/>
           </a:ln>
         </p:spPr>
+        <p:txBody>
+          <a:bodyPr/>
+          <a:lstStyle/>
+          <a:p>
+            <a:endParaRPr lang="en-LB"/>
+          </a:p>
+        </p:txBody>
       </p:sp>
       <p:sp>
         <p:nvSpPr>
@@ -4972,7 +4953,7 @@
           <a:bodyPr wrap="square" rtlCol="0" anchor="ctr"/>
           <a:lstStyle/>
           <a:p>
-            <a:pPr algn="ctr" indent="0" marL="0">
+            <a:pPr marL="0" indent="0" algn="ctr">
               <a:buNone/>
             </a:pPr>
             <a:r>
@@ -5011,7 +4992,7 @@
           <a:bodyPr wrap="square" rtlCol="0" anchor="ctr"/>
           <a:lstStyle/>
           <a:p>
-            <a:pPr algn="ctr" indent="0" marL="0">
+            <a:pPr marL="0" indent="0" algn="ctr">
               <a:buNone/>
             </a:pPr>
             <a:r>
@@ -5053,13 +5034,20 @@
             <a:prstDash val="solid"/>
           </a:ln>
           <a:effectLst>
-            <a:outerShdw sx="100000" sy="100000" kx="0" ky="0" algn="bl" rotWithShape="0" blurRad="101600" dist="38100" dir="8100000">
+            <a:outerShdw blurRad="101600" dist="38100" dir="8100000" algn="bl" rotWithShape="0">
               <a:srgbClr val="000000">
                 <a:alpha val="12000"/>
               </a:srgbClr>
             </a:outerShdw>
           </a:effectLst>
         </p:spPr>
+        <p:txBody>
+          <a:bodyPr/>
+          <a:lstStyle/>
+          <a:p>
+            <a:endParaRPr lang="en-LB"/>
+          </a:p>
+        </p:txBody>
       </p:sp>
       <p:sp>
         <p:nvSpPr>
@@ -5085,6 +5073,13 @@
             <a:prstDash val="solid"/>
           </a:ln>
         </p:spPr>
+        <p:txBody>
+          <a:bodyPr/>
+          <a:lstStyle/>
+          <a:p>
+            <a:endParaRPr lang="en-LB"/>
+          </a:p>
+        </p:txBody>
       </p:sp>
       <p:sp>
         <p:nvSpPr>
@@ -5107,7 +5102,7 @@
           <a:bodyPr wrap="square" rtlCol="0" anchor="ctr"/>
           <a:lstStyle/>
           <a:p>
-            <a:pPr algn="ctr" indent="0" marL="0">
+            <a:pPr marL="0" indent="0" algn="ctr">
               <a:buNone/>
             </a:pPr>
             <a:r>
@@ -5146,7 +5141,7 @@
           <a:bodyPr wrap="square" rtlCol="0" anchor="ctr"/>
           <a:lstStyle/>
           <a:p>
-            <a:pPr algn="ctr" indent="0" marL="0">
+            <a:pPr marL="0" indent="0" algn="ctr">
               <a:buNone/>
             </a:pPr>
             <a:r>
@@ -5192,6 +5187,13 @@
             <a:prstDash val="solid"/>
           </a:ln>
         </p:spPr>
+        <p:txBody>
+          <a:bodyPr/>
+          <a:lstStyle/>
+          <a:p>
+            <a:endParaRPr lang="en-LB"/>
+          </a:p>
+        </p:txBody>
       </p:sp>
       <p:sp>
         <p:nvSpPr>
@@ -5214,7 +5216,7 @@
           <a:bodyPr wrap="square" rtlCol="0" anchor="ctr"/>
           <a:lstStyle/>
           <a:p>
-            <a:pPr algn="ctr" indent="0" marL="0">
+            <a:pPr marL="0" indent="0" algn="ctr">
               <a:buNone/>
             </a:pPr>
             <a:r>
@@ -5260,6 +5262,13 @@
             <a:prstDash val="solid"/>
           </a:ln>
         </p:spPr>
+        <p:txBody>
+          <a:bodyPr/>
+          <a:lstStyle/>
+          <a:p>
+            <a:endParaRPr lang="en-LB"/>
+          </a:p>
+        </p:txBody>
       </p:sp>
       <p:sp>
         <p:nvSpPr>
@@ -5282,7 +5291,7 @@
           <a:bodyPr wrap="square" rtlCol="0" anchor="ctr"/>
           <a:lstStyle/>
           <a:p>
-            <a:pPr algn="ctr" indent="0" marL="0">
+            <a:pPr marL="0" indent="0" algn="ctr">
               <a:buNone/>
             </a:pPr>
             <a:r>
@@ -5328,6 +5337,13 @@
             <a:prstDash val="solid"/>
           </a:ln>
         </p:spPr>
+        <p:txBody>
+          <a:bodyPr/>
+          <a:lstStyle/>
+          <a:p>
+            <a:endParaRPr lang="en-LB"/>
+          </a:p>
+        </p:txBody>
       </p:sp>
       <p:sp>
         <p:nvSpPr>
@@ -5350,7 +5366,7 @@
           <a:bodyPr wrap="square" rtlCol="0" anchor="ctr"/>
           <a:lstStyle/>
           <a:p>
-            <a:pPr algn="ctr" indent="0" marL="0">
+            <a:pPr marL="0" indent="0" algn="ctr">
               <a:buNone/>
             </a:pPr>
             <a:r>
@@ -5396,6 +5412,13 @@
             <a:prstDash val="solid"/>
           </a:ln>
         </p:spPr>
+        <p:txBody>
+          <a:bodyPr/>
+          <a:lstStyle/>
+          <a:p>
+            <a:endParaRPr lang="en-LB"/>
+          </a:p>
+        </p:txBody>
       </p:sp>
       <p:sp>
         <p:nvSpPr>
@@ -5418,7 +5441,7 @@
           <a:bodyPr wrap="square" rtlCol="0" anchor="ctr"/>
           <a:lstStyle/>
           <a:p>
-            <a:pPr algn="ctr" indent="0" marL="0">
+            <a:pPr marL="0" indent="0" algn="ctr">
               <a:buNone/>
             </a:pPr>
             <a:r>
@@ -5457,7 +5480,7 @@
           <a:bodyPr wrap="square" rtlCol="0" anchor="ctr"/>
           <a:lstStyle/>
           <a:p>
-            <a:pPr algn="ctr" indent="0" marL="0">
+            <a:pPr marL="0" indent="0" algn="ctr">
               <a:buNone/>
             </a:pPr>
             <a:r>
@@ -5469,7 +5492,7 @@
                 <a:ea typeface="Calibri" pitchFamily="34" charset="-122"/>
                 <a:cs typeface="Calibri" pitchFamily="34" charset="-120"/>
               </a:rPr>
-              <a:t>Merges gates for efficiency — fewer params, faster convergence</a:t>
+              <a:t>Merges gates for efficiency: fewer params, faster convergence</a:t>
             </a:r>
             <a:endParaRPr lang="en-US" sz="1000" dirty="0"/>
           </a:p>
@@ -5499,13 +5522,20 @@
             <a:prstDash val="solid"/>
           </a:ln>
           <a:effectLst>
-            <a:outerShdw sx="100000" sy="100000" kx="0" ky="0" algn="bl" rotWithShape="0" blurRad="101600" dist="38100" dir="8100000">
+            <a:outerShdw blurRad="101600" dist="38100" dir="8100000" algn="bl" rotWithShape="0">
               <a:srgbClr val="000000">
                 <a:alpha val="12000"/>
               </a:srgbClr>
             </a:outerShdw>
           </a:effectLst>
         </p:spPr>
+        <p:txBody>
+          <a:bodyPr/>
+          <a:lstStyle/>
+          <a:p>
+            <a:endParaRPr lang="en-LB"/>
+          </a:p>
+        </p:txBody>
       </p:sp>
       <p:sp>
         <p:nvSpPr>
@@ -5531,6 +5561,13 @@
             <a:prstDash val="solid"/>
           </a:ln>
         </p:spPr>
+        <p:txBody>
+          <a:bodyPr/>
+          <a:lstStyle/>
+          <a:p>
+            <a:endParaRPr lang="en-LB"/>
+          </a:p>
+        </p:txBody>
       </p:sp>
       <p:sp>
         <p:nvSpPr>
@@ -5553,7 +5590,7 @@
           <a:bodyPr wrap="square" rtlCol="0" anchor="ctr"/>
           <a:lstStyle/>
           <a:p>
-            <a:pPr algn="ctr" indent="0" marL="0">
+            <a:pPr marL="0" indent="0" algn="ctr">
               <a:buNone/>
             </a:pPr>
             <a:r>
@@ -5592,7 +5629,7 @@
           <a:bodyPr wrap="square" rtlCol="0" anchor="ctr"/>
           <a:lstStyle/>
           <a:p>
-            <a:pPr algn="ctr" indent="0" marL="0">
+            <a:pPr marL="0" indent="0" algn="ctr">
               <a:buNone/>
             </a:pPr>
             <a:r>
@@ -5638,6 +5675,13 @@
             <a:prstDash val="solid"/>
           </a:ln>
         </p:spPr>
+        <p:txBody>
+          <a:bodyPr/>
+          <a:lstStyle/>
+          <a:p>
+            <a:endParaRPr lang="en-LB"/>
+          </a:p>
+        </p:txBody>
       </p:sp>
       <p:sp>
         <p:nvSpPr>
@@ -5660,7 +5704,7 @@
           <a:bodyPr wrap="square" rtlCol="0" anchor="ctr"/>
           <a:lstStyle/>
           <a:p>
-            <a:pPr algn="ctr" indent="0" marL="0">
+            <a:pPr marL="0" indent="0" algn="ctr">
               <a:buNone/>
             </a:pPr>
             <a:r>
@@ -5706,6 +5750,13 @@
             <a:prstDash val="solid"/>
           </a:ln>
         </p:spPr>
+        <p:txBody>
+          <a:bodyPr/>
+          <a:lstStyle/>
+          <a:p>
+            <a:endParaRPr lang="en-LB"/>
+          </a:p>
+        </p:txBody>
       </p:sp>
       <p:sp>
         <p:nvSpPr>
@@ -5728,7 +5779,7 @@
           <a:bodyPr wrap="square" rtlCol="0" anchor="ctr"/>
           <a:lstStyle/>
           <a:p>
-            <a:pPr algn="ctr" indent="0" marL="0">
+            <a:pPr marL="0" indent="0" algn="ctr">
               <a:buNone/>
             </a:pPr>
             <a:r>
@@ -5774,6 +5825,13 @@
             <a:prstDash val="solid"/>
           </a:ln>
         </p:spPr>
+        <p:txBody>
+          <a:bodyPr/>
+          <a:lstStyle/>
+          <a:p>
+            <a:endParaRPr lang="en-LB"/>
+          </a:p>
+        </p:txBody>
       </p:sp>
       <p:sp>
         <p:nvSpPr>
@@ -5796,7 +5854,7 @@
           <a:bodyPr wrap="square" rtlCol="0" anchor="ctr"/>
           <a:lstStyle/>
           <a:p>
-            <a:pPr algn="ctr" indent="0" marL="0">
+            <a:pPr marL="0" indent="0" algn="ctr">
               <a:buNone/>
             </a:pPr>
             <a:r>
@@ -5842,6 +5900,13 @@
             <a:prstDash val="solid"/>
           </a:ln>
         </p:spPr>
+        <p:txBody>
+          <a:bodyPr/>
+          <a:lstStyle/>
+          <a:p>
+            <a:endParaRPr lang="en-LB"/>
+          </a:p>
+        </p:txBody>
       </p:sp>
       <p:sp>
         <p:nvSpPr>
@@ -5864,7 +5929,7 @@
           <a:bodyPr wrap="square" rtlCol="0" anchor="ctr"/>
           <a:lstStyle/>
           <a:p>
-            <a:pPr algn="ctr" indent="0" marL="0">
+            <a:pPr marL="0" indent="0" algn="ctr">
               <a:buNone/>
             </a:pPr>
             <a:r>
@@ -5903,7 +5968,7 @@
           <a:bodyPr wrap="square" rtlCol="0" anchor="ctr"/>
           <a:lstStyle/>
           <a:p>
-            <a:pPr algn="ctr" indent="0" marL="0">
+            <a:pPr marL="0" indent="0" algn="ctr">
               <a:buNone/>
             </a:pPr>
             <a:r>
@@ -5915,7 +5980,7 @@
                 <a:ea typeface="Calibri" pitchFamily="34" charset="-122"/>
                 <a:cs typeface="Calibri" pitchFamily="34" charset="-120"/>
               </a:rPr>
-              <a:t>Pre-trained on 3.3B words — fine-tuned end-to-end for classification</a:t>
+              <a:t>Pre-trained on 3.3B words:  fine-tuned end-to-end for classification</a:t>
             </a:r>
             <a:endParaRPr lang="en-US" sz="1000" dirty="0"/>
           </a:p>
@@ -5937,6 +6002,7 @@
         <a:solidFill>
           <a:srgbClr val="F2F6FC"/>
         </a:solidFill>
+        <a:effectLst/>
       </p:bgPr>
     </p:bg>
     <p:spTree>
@@ -5977,6 +6043,13 @@
             <a:prstDash val="solid"/>
           </a:ln>
         </p:spPr>
+        <p:txBody>
+          <a:bodyPr/>
+          <a:lstStyle/>
+          <a:p>
+            <a:endParaRPr lang="en-LB"/>
+          </a:p>
+        </p:txBody>
       </p:sp>
       <p:sp>
         <p:nvSpPr>
@@ -5999,7 +6072,7 @@
           <a:bodyPr wrap="square" lIns="0" tIns="0" rIns="0" bIns="0" rtlCol="0" anchor="ctr"/>
           <a:lstStyle/>
           <a:p>
-            <a:pPr indent="0" marL="0">
+            <a:pPr marL="0" indent="0">
               <a:buNone/>
             </a:pPr>
             <a:r>
@@ -6041,6 +6114,13 @@
             <a:prstDash val="solid"/>
           </a:ln>
         </p:spPr>
+        <p:txBody>
+          <a:bodyPr/>
+          <a:lstStyle/>
+          <a:p>
+            <a:endParaRPr lang="en-LB"/>
+          </a:p>
+        </p:txBody>
       </p:sp>
       <p:sp>
         <p:nvSpPr>
@@ -6066,6 +6146,13 @@
             <a:prstDash val="solid"/>
           </a:ln>
         </p:spPr>
+        <p:txBody>
+          <a:bodyPr/>
+          <a:lstStyle/>
+          <a:p>
+            <a:endParaRPr lang="en-LB"/>
+          </a:p>
+        </p:txBody>
       </p:sp>
       <p:sp>
         <p:nvSpPr>
@@ -6088,7 +6175,7 @@
           <a:bodyPr wrap="square" rtlCol="0" anchor="ctr"/>
           <a:lstStyle/>
           <a:p>
-            <a:pPr indent="0" marL="0">
+            <a:pPr marL="0" indent="0">
               <a:buNone/>
             </a:pPr>
             <a:r>
@@ -6108,7 +6195,7 @@
       </p:sp>
       <p:graphicFrame>
         <p:nvGraphicFramePr>
-          <p:cNvPr id="6" name="Table 0"/>
+          <p:cNvPr id="7" name="Table 0"/>
           <p:cNvGraphicFramePr>
             <a:graphicFrameLocks noGrp="1"/>
           </p:cNvGraphicFramePr>
@@ -6129,8 +6216,20 @@
             <a:tbl>
               <a:tblPr/>
               <a:tblGrid>
-                <a:gridCol w="1645920"/>
-                <a:gridCol w="2194560"/>
+                <a:gridCol w="1645920">
+                  <a:extLst>
+                    <a:ext uri="{9D8B030D-6E8A-4147-A177-3AD203B41FA5}">
+                      <a16:colId xmlns:a16="http://schemas.microsoft.com/office/drawing/2014/main" val="20000"/>
+                    </a:ext>
+                  </a:extLst>
+                </a:gridCol>
+                <a:gridCol w="2194560">
+                  <a:extLst>
+                    <a:ext uri="{9D8B030D-6E8A-4147-A177-3AD203B41FA5}">
+                      <a16:colId xmlns:a16="http://schemas.microsoft.com/office/drawing/2014/main" val="20001"/>
+                    </a:ext>
+                  </a:extLst>
+                </a:gridCol>
               </a:tblGrid>
               <a:tr h="457200">
                 <a:tc>
@@ -6138,7 +6237,7 @@
                     <a:bodyPr/>
                     <a:lstStyle/>
                     <a:p>
-                      <a:pPr indent="0" marL="0">
+                      <a:pPr marL="0" indent="0">
                         <a:buNone/>
                       </a:pPr>
                       <a:r>
@@ -6159,7 +6258,7 @@
                       </a:endParaRPr>
                     </a:p>
                   </a:txBody>
-                  <a:tcPr marL="91440" marR="91440" marT="45720" marB="45720">
+                  <a:tcPr>
                     <a:lnL w="12700" cap="flat" cmpd="sng" algn="ctr">
                       <a:solidFill>
                         <a:srgbClr val="D1D5DB"/>
@@ -6203,7 +6302,7 @@
                     <a:bodyPr/>
                     <a:lstStyle/>
                     <a:p>
-                      <a:pPr indent="0" marL="0">
+                      <a:pPr marL="0" indent="0">
                         <a:buNone/>
                       </a:pPr>
                       <a:r>
@@ -6224,7 +6323,7 @@
                       </a:endParaRPr>
                     </a:p>
                   </a:txBody>
-                  <a:tcPr marL="91440" marR="91440" marT="45720" marB="45720">
+                  <a:tcPr>
                     <a:lnL w="12700" cap="flat" cmpd="sng" algn="ctr">
                       <a:solidFill>
                         <a:srgbClr val="D1D5DB"/>
@@ -6263,6 +6362,11 @@
                     </a:lnB>
                   </a:tcPr>
                 </a:tc>
+                <a:extLst>
+                  <a:ext uri="{0D108BD9-81ED-4DB2-BD59-A6C34878D82A}">
+                    <a16:rowId xmlns:a16="http://schemas.microsoft.com/office/drawing/2014/main" val="10000"/>
+                  </a:ext>
+                </a:extLst>
               </a:tr>
               <a:tr h="457200">
                 <a:tc>
@@ -6270,7 +6374,7 @@
                     <a:bodyPr/>
                     <a:lstStyle/>
                     <a:p>
-                      <a:pPr indent="0" marL="0">
+                      <a:pPr marL="0" indent="0">
                         <a:buNone/>
                       </a:pPr>
                       <a:r>
@@ -6291,7 +6395,7 @@
                       </a:endParaRPr>
                     </a:p>
                   </a:txBody>
-                  <a:tcPr marL="91440" marR="91440" marT="45720" marB="45720">
+                  <a:tcPr>
                     <a:lnL w="12700" cap="flat" cmpd="sng" algn="ctr">
                       <a:solidFill>
                         <a:srgbClr val="D1D5DB"/>
@@ -6335,7 +6439,7 @@
                     <a:bodyPr/>
                     <a:lstStyle/>
                     <a:p>
-                      <a:pPr indent="0" marL="0">
+                      <a:pPr marL="0" indent="0">
                         <a:buNone/>
                       </a:pPr>
                       <a:r>
@@ -6356,7 +6460,7 @@
                       </a:endParaRPr>
                     </a:p>
                   </a:txBody>
-                  <a:tcPr marL="91440" marR="91440" marT="45720" marB="45720">
+                  <a:tcPr>
                     <a:lnL w="12700" cap="flat" cmpd="sng" algn="ctr">
                       <a:solidFill>
                         <a:srgbClr val="D1D5DB"/>
@@ -6395,6 +6499,11 @@
                     </a:lnB>
                   </a:tcPr>
                 </a:tc>
+                <a:extLst>
+                  <a:ext uri="{0D108BD9-81ED-4DB2-BD59-A6C34878D82A}">
+                    <a16:rowId xmlns:a16="http://schemas.microsoft.com/office/drawing/2014/main" val="10001"/>
+                  </a:ext>
+                </a:extLst>
               </a:tr>
               <a:tr h="457200">
                 <a:tc>
@@ -6402,7 +6511,7 @@
                     <a:bodyPr/>
                     <a:lstStyle/>
                     <a:p>
-                      <a:pPr indent="0" marL="0">
+                      <a:pPr marL="0" indent="0">
                         <a:buNone/>
                       </a:pPr>
                       <a:r>
@@ -6423,7 +6532,7 @@
                       </a:endParaRPr>
                     </a:p>
                   </a:txBody>
-                  <a:tcPr marL="91440" marR="91440" marT="45720" marB="45720">
+                  <a:tcPr>
                     <a:lnL w="12700" cap="flat" cmpd="sng" algn="ctr">
                       <a:solidFill>
                         <a:srgbClr val="D1D5DB"/>
@@ -6467,7 +6576,7 @@
                     <a:bodyPr/>
                     <a:lstStyle/>
                     <a:p>
-                      <a:pPr indent="0" marL="0">
+                      <a:pPr marL="0" indent="0">
                         <a:buNone/>
                       </a:pPr>
                       <a:r>
@@ -6488,7 +6597,7 @@
                       </a:endParaRPr>
                     </a:p>
                   </a:txBody>
-                  <a:tcPr marL="91440" marR="91440" marT="45720" marB="45720">
+                  <a:tcPr>
                     <a:lnL w="12700" cap="flat" cmpd="sng" algn="ctr">
                       <a:solidFill>
                         <a:srgbClr val="D1D5DB"/>
@@ -6527,6 +6636,11 @@
                     </a:lnB>
                   </a:tcPr>
                 </a:tc>
+                <a:extLst>
+                  <a:ext uri="{0D108BD9-81ED-4DB2-BD59-A6C34878D82A}">
+                    <a16:rowId xmlns:a16="http://schemas.microsoft.com/office/drawing/2014/main" val="10002"/>
+                  </a:ext>
+                </a:extLst>
               </a:tr>
               <a:tr h="457200">
                 <a:tc>
@@ -6534,7 +6648,7 @@
                     <a:bodyPr/>
                     <a:lstStyle/>
                     <a:p>
-                      <a:pPr indent="0" marL="0">
+                      <a:pPr marL="0" indent="0">
                         <a:buNone/>
                       </a:pPr>
                       <a:r>
@@ -6555,7 +6669,7 @@
                       </a:endParaRPr>
                     </a:p>
                   </a:txBody>
-                  <a:tcPr marL="91440" marR="91440" marT="45720" marB="45720">
+                  <a:tcPr>
                     <a:lnL w="12700" cap="flat" cmpd="sng" algn="ctr">
                       <a:solidFill>
                         <a:srgbClr val="D1D5DB"/>
@@ -6599,7 +6713,7 @@
                     <a:bodyPr/>
                     <a:lstStyle/>
                     <a:p>
-                      <a:pPr indent="0" marL="0">
+                      <a:pPr marL="0" indent="0">
                         <a:buNone/>
                       </a:pPr>
                       <a:r>
@@ -6620,7 +6734,7 @@
                       </a:endParaRPr>
                     </a:p>
                   </a:txBody>
-                  <a:tcPr marL="91440" marR="91440" marT="45720" marB="45720">
+                  <a:tcPr>
                     <a:lnL w="12700" cap="flat" cmpd="sng" algn="ctr">
                       <a:solidFill>
                         <a:srgbClr val="D1D5DB"/>
@@ -6659,6 +6773,11 @@
                     </a:lnB>
                   </a:tcPr>
                 </a:tc>
+                <a:extLst>
+                  <a:ext uri="{0D108BD9-81ED-4DB2-BD59-A6C34878D82A}">
+                    <a16:rowId xmlns:a16="http://schemas.microsoft.com/office/drawing/2014/main" val="10003"/>
+                  </a:ext>
+                </a:extLst>
               </a:tr>
               <a:tr h="457200">
                 <a:tc>
@@ -6666,7 +6785,7 @@
                     <a:bodyPr/>
                     <a:lstStyle/>
                     <a:p>
-                      <a:pPr indent="0" marL="0">
+                      <a:pPr marL="0" indent="0">
                         <a:buNone/>
                       </a:pPr>
                       <a:r>
@@ -6687,7 +6806,7 @@
                       </a:endParaRPr>
                     </a:p>
                   </a:txBody>
-                  <a:tcPr marL="91440" marR="91440" marT="45720" marB="45720">
+                  <a:tcPr>
                     <a:lnL w="12700" cap="flat" cmpd="sng" algn="ctr">
                       <a:solidFill>
                         <a:srgbClr val="D1D5DB"/>
@@ -6731,7 +6850,7 @@
                     <a:bodyPr/>
                     <a:lstStyle/>
                     <a:p>
-                      <a:pPr indent="0" marL="0">
+                      <a:pPr marL="0" indent="0">
                         <a:buNone/>
                       </a:pPr>
                       <a:r>
@@ -6752,7 +6871,7 @@
                       </a:endParaRPr>
                     </a:p>
                   </a:txBody>
-                  <a:tcPr marL="91440" marR="91440" marT="45720" marB="45720">
+                  <a:tcPr>
                     <a:lnL w="12700" cap="flat" cmpd="sng" algn="ctr">
                       <a:solidFill>
                         <a:srgbClr val="D1D5DB"/>
@@ -6791,6 +6910,11 @@
                     </a:lnB>
                   </a:tcPr>
                 </a:tc>
+                <a:extLst>
+                  <a:ext uri="{0D108BD9-81ED-4DB2-BD59-A6C34878D82A}">
+                    <a16:rowId xmlns:a16="http://schemas.microsoft.com/office/drawing/2014/main" val="10004"/>
+                  </a:ext>
+                </a:extLst>
               </a:tr>
               <a:tr h="457200">
                 <a:tc>
@@ -6798,7 +6922,7 @@
                     <a:bodyPr/>
                     <a:lstStyle/>
                     <a:p>
-                      <a:pPr indent="0" marL="0">
+                      <a:pPr marL="0" indent="0">
                         <a:buNone/>
                       </a:pPr>
                       <a:r>
@@ -6819,7 +6943,7 @@
                       </a:endParaRPr>
                     </a:p>
                   </a:txBody>
-                  <a:tcPr marL="91440" marR="91440" marT="45720" marB="45720">
+                  <a:tcPr>
                     <a:lnL w="12700" cap="flat" cmpd="sng" algn="ctr">
                       <a:solidFill>
                         <a:srgbClr val="D1D5DB"/>
@@ -6863,7 +6987,7 @@
                     <a:bodyPr/>
                     <a:lstStyle/>
                     <a:p>
-                      <a:pPr indent="0" marL="0">
+                      <a:pPr marL="0" indent="0">
                         <a:buNone/>
                       </a:pPr>
                       <a:r>
@@ -6884,7 +7008,7 @@
                       </a:endParaRPr>
                     </a:p>
                   </a:txBody>
-                  <a:tcPr marL="91440" marR="91440" marT="45720" marB="45720">
+                  <a:tcPr>
                     <a:lnL w="12700" cap="flat" cmpd="sng" algn="ctr">
                       <a:solidFill>
                         <a:srgbClr val="D1D5DB"/>
@@ -6923,6 +7047,11 @@
                     </a:lnB>
                   </a:tcPr>
                 </a:tc>
+                <a:extLst>
+                  <a:ext uri="{0D108BD9-81ED-4DB2-BD59-A6C34878D82A}">
+                    <a16:rowId xmlns:a16="http://schemas.microsoft.com/office/drawing/2014/main" val="10005"/>
+                  </a:ext>
+                </a:extLst>
               </a:tr>
               <a:tr h="457200">
                 <a:tc>
@@ -6930,7 +7059,7 @@
                     <a:bodyPr/>
                     <a:lstStyle/>
                     <a:p>
-                      <a:pPr indent="0" marL="0">
+                      <a:pPr marL="0" indent="0">
                         <a:buNone/>
                       </a:pPr>
                       <a:r>
@@ -6951,7 +7080,7 @@
                       </a:endParaRPr>
                     </a:p>
                   </a:txBody>
-                  <a:tcPr marL="91440" marR="91440" marT="45720" marB="45720">
+                  <a:tcPr>
                     <a:lnL w="12700" cap="flat" cmpd="sng" algn="ctr">
                       <a:solidFill>
                         <a:srgbClr val="D1D5DB"/>
@@ -6995,7 +7124,7 @@
                     <a:bodyPr/>
                     <a:lstStyle/>
                     <a:p>
-                      <a:pPr indent="0" marL="0">
+                      <a:pPr marL="0" indent="0">
                         <a:buNone/>
                       </a:pPr>
                       <a:r>
@@ -7016,7 +7145,7 @@
                       </a:endParaRPr>
                     </a:p>
                   </a:txBody>
-                  <a:tcPr marL="91440" marR="91440" marT="45720" marB="45720">
+                  <a:tcPr>
                     <a:lnL w="12700" cap="flat" cmpd="sng" algn="ctr">
                       <a:solidFill>
                         <a:srgbClr val="D1D5DB"/>
@@ -7055,6 +7184,11 @@
                     </a:lnB>
                   </a:tcPr>
                 </a:tc>
+                <a:extLst>
+                  <a:ext uri="{0D108BD9-81ED-4DB2-BD59-A6C34878D82A}">
+                    <a16:rowId xmlns:a16="http://schemas.microsoft.com/office/drawing/2014/main" val="10006"/>
+                  </a:ext>
+                </a:extLst>
               </a:tr>
             </a:tbl>
           </a:graphicData>
@@ -7084,6 +7218,13 @@
             <a:prstDash val="solid"/>
           </a:ln>
         </p:spPr>
+        <p:txBody>
+          <a:bodyPr/>
+          <a:lstStyle/>
+          <a:p>
+            <a:endParaRPr lang="en-LB"/>
+          </a:p>
+        </p:txBody>
       </p:sp>
       <p:sp>
         <p:nvSpPr>
@@ -7106,7 +7247,7 @@
           <a:bodyPr wrap="square" rtlCol="0" anchor="ctr"/>
           <a:lstStyle/>
           <a:p>
-            <a:pPr indent="0" marL="0">
+            <a:pPr marL="0" indent="0">
               <a:buNone/>
             </a:pPr>
             <a:r>
@@ -7147,8 +7288,20 @@
             <a:tbl>
               <a:tblPr/>
               <a:tblGrid>
-                <a:gridCol w="1737360"/>
-                <a:gridCol w="2103120"/>
+                <a:gridCol w="1737360">
+                  <a:extLst>
+                    <a:ext uri="{9D8B030D-6E8A-4147-A177-3AD203B41FA5}">
+                      <a16:colId xmlns:a16="http://schemas.microsoft.com/office/drawing/2014/main" val="20000"/>
+                    </a:ext>
+                  </a:extLst>
+                </a:gridCol>
+                <a:gridCol w="2103120">
+                  <a:extLst>
+                    <a:ext uri="{9D8B030D-6E8A-4147-A177-3AD203B41FA5}">
+                      <a16:colId xmlns:a16="http://schemas.microsoft.com/office/drawing/2014/main" val="20001"/>
+                    </a:ext>
+                  </a:extLst>
+                </a:gridCol>
               </a:tblGrid>
               <a:tr h="400050">
                 <a:tc>
@@ -7156,7 +7309,7 @@
                     <a:bodyPr/>
                     <a:lstStyle/>
                     <a:p>
-                      <a:pPr indent="0" marL="0">
+                      <a:pPr marL="0" indent="0">
                         <a:buNone/>
                       </a:pPr>
                       <a:r>
@@ -7177,7 +7330,7 @@
                       </a:endParaRPr>
                     </a:p>
                   </a:txBody>
-                  <a:tcPr marL="91440" marR="91440" marT="45720" marB="45720">
+                  <a:tcPr>
                     <a:lnL w="12700" cap="flat" cmpd="sng" algn="ctr">
                       <a:solidFill>
                         <a:srgbClr val="D1D5DB"/>
@@ -7221,7 +7374,7 @@
                     <a:bodyPr/>
                     <a:lstStyle/>
                     <a:p>
-                      <a:pPr indent="0" marL="0">
+                      <a:pPr marL="0" indent="0">
                         <a:buNone/>
                       </a:pPr>
                       <a:r>
@@ -7242,7 +7395,7 @@
                       </a:endParaRPr>
                     </a:p>
                   </a:txBody>
-                  <a:tcPr marL="91440" marR="91440" marT="45720" marB="45720">
+                  <a:tcPr>
                     <a:lnL w="12700" cap="flat" cmpd="sng" algn="ctr">
                       <a:solidFill>
                         <a:srgbClr val="D1D5DB"/>
@@ -7281,6 +7434,11 @@
                     </a:lnB>
                   </a:tcPr>
                 </a:tc>
+                <a:extLst>
+                  <a:ext uri="{0D108BD9-81ED-4DB2-BD59-A6C34878D82A}">
+                    <a16:rowId xmlns:a16="http://schemas.microsoft.com/office/drawing/2014/main" val="10000"/>
+                  </a:ext>
+                </a:extLst>
               </a:tr>
               <a:tr h="400050">
                 <a:tc>
@@ -7288,7 +7446,7 @@
                     <a:bodyPr/>
                     <a:lstStyle/>
                     <a:p>
-                      <a:pPr indent="0" marL="0">
+                      <a:pPr marL="0" indent="0">
                         <a:buNone/>
                       </a:pPr>
                       <a:r>
@@ -7309,7 +7467,7 @@
                       </a:endParaRPr>
                     </a:p>
                   </a:txBody>
-                  <a:tcPr marL="91440" marR="91440" marT="45720" marB="45720">
+                  <a:tcPr>
                     <a:lnL w="12700" cap="flat" cmpd="sng" algn="ctr">
                       <a:solidFill>
                         <a:srgbClr val="D1D5DB"/>
@@ -7353,7 +7511,7 @@
                     <a:bodyPr/>
                     <a:lstStyle/>
                     <a:p>
-                      <a:pPr indent="0" marL="0">
+                      <a:pPr marL="0" indent="0">
                         <a:buNone/>
                       </a:pPr>
                       <a:r>
@@ -7374,7 +7532,7 @@
                       </a:endParaRPr>
                     </a:p>
                   </a:txBody>
-                  <a:tcPr marL="91440" marR="91440" marT="45720" marB="45720">
+                  <a:tcPr>
                     <a:lnL w="12700" cap="flat" cmpd="sng" algn="ctr">
                       <a:solidFill>
                         <a:srgbClr val="D1D5DB"/>
@@ -7413,6 +7571,11 @@
                     </a:lnB>
                   </a:tcPr>
                 </a:tc>
+                <a:extLst>
+                  <a:ext uri="{0D108BD9-81ED-4DB2-BD59-A6C34878D82A}">
+                    <a16:rowId xmlns:a16="http://schemas.microsoft.com/office/drawing/2014/main" val="10001"/>
+                  </a:ext>
+                </a:extLst>
               </a:tr>
               <a:tr h="400050">
                 <a:tc>
@@ -7420,7 +7583,7 @@
                     <a:bodyPr/>
                     <a:lstStyle/>
                     <a:p>
-                      <a:pPr indent="0" marL="0">
+                      <a:pPr marL="0" indent="0">
                         <a:buNone/>
                       </a:pPr>
                       <a:r>
@@ -7441,7 +7604,7 @@
                       </a:endParaRPr>
                     </a:p>
                   </a:txBody>
-                  <a:tcPr marL="91440" marR="91440" marT="45720" marB="45720">
+                  <a:tcPr>
                     <a:lnL w="12700" cap="flat" cmpd="sng" algn="ctr">
                       <a:solidFill>
                         <a:srgbClr val="D1D5DB"/>
@@ -7485,7 +7648,7 @@
                     <a:bodyPr/>
                     <a:lstStyle/>
                     <a:p>
-                      <a:pPr indent="0" marL="0">
+                      <a:pPr marL="0" indent="0">
                         <a:buNone/>
                       </a:pPr>
                       <a:r>
@@ -7506,7 +7669,7 @@
                       </a:endParaRPr>
                     </a:p>
                   </a:txBody>
-                  <a:tcPr marL="91440" marR="91440" marT="45720" marB="45720">
+                  <a:tcPr>
                     <a:lnL w="12700" cap="flat" cmpd="sng" algn="ctr">
                       <a:solidFill>
                         <a:srgbClr val="D1D5DB"/>
@@ -7545,6 +7708,11 @@
                     </a:lnB>
                   </a:tcPr>
                 </a:tc>
+                <a:extLst>
+                  <a:ext uri="{0D108BD9-81ED-4DB2-BD59-A6C34878D82A}">
+                    <a16:rowId xmlns:a16="http://schemas.microsoft.com/office/drawing/2014/main" val="10002"/>
+                  </a:ext>
+                </a:extLst>
               </a:tr>
               <a:tr h="400050">
                 <a:tc>
@@ -7552,7 +7720,7 @@
                     <a:bodyPr/>
                     <a:lstStyle/>
                     <a:p>
-                      <a:pPr indent="0" marL="0">
+                      <a:pPr marL="0" indent="0">
                         <a:buNone/>
                       </a:pPr>
                       <a:r>
@@ -7573,7 +7741,7 @@
                       </a:endParaRPr>
                     </a:p>
                   </a:txBody>
-                  <a:tcPr marL="91440" marR="91440" marT="45720" marB="45720">
+                  <a:tcPr>
                     <a:lnL w="12700" cap="flat" cmpd="sng" algn="ctr">
                       <a:solidFill>
                         <a:srgbClr val="D1D5DB"/>
@@ -7617,7 +7785,7 @@
                     <a:bodyPr/>
                     <a:lstStyle/>
                     <a:p>
-                      <a:pPr indent="0" marL="0">
+                      <a:pPr marL="0" indent="0">
                         <a:buNone/>
                       </a:pPr>
                       <a:r>
@@ -7638,7 +7806,7 @@
                       </a:endParaRPr>
                     </a:p>
                   </a:txBody>
-                  <a:tcPr marL="91440" marR="91440" marT="45720" marB="45720">
+                  <a:tcPr>
                     <a:lnL w="12700" cap="flat" cmpd="sng" algn="ctr">
                       <a:solidFill>
                         <a:srgbClr val="D1D5DB"/>
@@ -7677,6 +7845,11 @@
                     </a:lnB>
                   </a:tcPr>
                 </a:tc>
+                <a:extLst>
+                  <a:ext uri="{0D108BD9-81ED-4DB2-BD59-A6C34878D82A}">
+                    <a16:rowId xmlns:a16="http://schemas.microsoft.com/office/drawing/2014/main" val="10003"/>
+                  </a:ext>
+                </a:extLst>
               </a:tr>
               <a:tr h="400050">
                 <a:tc>
@@ -7684,7 +7857,7 @@
                     <a:bodyPr/>
                     <a:lstStyle/>
                     <a:p>
-                      <a:pPr indent="0" marL="0">
+                      <a:pPr marL="0" indent="0">
                         <a:buNone/>
                       </a:pPr>
                       <a:r>
@@ -7705,7 +7878,7 @@
                       </a:endParaRPr>
                     </a:p>
                   </a:txBody>
-                  <a:tcPr marL="91440" marR="91440" marT="45720" marB="45720">
+                  <a:tcPr>
                     <a:lnL w="12700" cap="flat" cmpd="sng" algn="ctr">
                       <a:solidFill>
                         <a:srgbClr val="D1D5DB"/>
@@ -7749,7 +7922,7 @@
                     <a:bodyPr/>
                     <a:lstStyle/>
                     <a:p>
-                      <a:pPr indent="0" marL="0">
+                      <a:pPr marL="0" indent="0">
                         <a:buNone/>
                       </a:pPr>
                       <a:r>
@@ -7770,7 +7943,7 @@
                       </a:endParaRPr>
                     </a:p>
                   </a:txBody>
-                  <a:tcPr marL="91440" marR="91440" marT="45720" marB="45720">
+                  <a:tcPr>
                     <a:lnL w="12700" cap="flat" cmpd="sng" algn="ctr">
                       <a:solidFill>
                         <a:srgbClr val="D1D5DB"/>
@@ -7809,6 +7982,11 @@
                     </a:lnB>
                   </a:tcPr>
                 </a:tc>
+                <a:extLst>
+                  <a:ext uri="{0D108BD9-81ED-4DB2-BD59-A6C34878D82A}">
+                    <a16:rowId xmlns:a16="http://schemas.microsoft.com/office/drawing/2014/main" val="10004"/>
+                  </a:ext>
+                </a:extLst>
               </a:tr>
               <a:tr h="400050">
                 <a:tc>
@@ -7816,7 +7994,7 @@
                     <a:bodyPr/>
                     <a:lstStyle/>
                     <a:p>
-                      <a:pPr indent="0" marL="0">
+                      <a:pPr marL="0" indent="0">
                         <a:buNone/>
                       </a:pPr>
                       <a:r>
@@ -7837,7 +8015,7 @@
                       </a:endParaRPr>
                     </a:p>
                   </a:txBody>
-                  <a:tcPr marL="91440" marR="91440" marT="45720" marB="45720">
+                  <a:tcPr>
                     <a:lnL w="12700" cap="flat" cmpd="sng" algn="ctr">
                       <a:solidFill>
                         <a:srgbClr val="D1D5DB"/>
@@ -7881,7 +8059,7 @@
                     <a:bodyPr/>
                     <a:lstStyle/>
                     <a:p>
-                      <a:pPr indent="0" marL="0">
+                      <a:pPr marL="0" indent="0">
                         <a:buNone/>
                       </a:pPr>
                       <a:r>
@@ -7902,7 +8080,7 @@
                       </a:endParaRPr>
                     </a:p>
                   </a:txBody>
-                  <a:tcPr marL="91440" marR="91440" marT="45720" marB="45720">
+                  <a:tcPr>
                     <a:lnL w="12700" cap="flat" cmpd="sng" algn="ctr">
                       <a:solidFill>
                         <a:srgbClr val="D1D5DB"/>
@@ -7941,6 +8119,11 @@
                     </a:lnB>
                   </a:tcPr>
                 </a:tc>
+                <a:extLst>
+                  <a:ext uri="{0D108BD9-81ED-4DB2-BD59-A6C34878D82A}">
+                    <a16:rowId xmlns:a16="http://schemas.microsoft.com/office/drawing/2014/main" val="10005"/>
+                  </a:ext>
+                </a:extLst>
               </a:tr>
               <a:tr h="400050">
                 <a:tc>
@@ -7948,7 +8131,7 @@
                     <a:bodyPr/>
                     <a:lstStyle/>
                     <a:p>
-                      <a:pPr indent="0" marL="0">
+                      <a:pPr marL="0" indent="0">
                         <a:buNone/>
                       </a:pPr>
                       <a:r>
@@ -7969,7 +8152,7 @@
                       </a:endParaRPr>
                     </a:p>
                   </a:txBody>
-                  <a:tcPr marL="91440" marR="91440" marT="45720" marB="45720">
+                  <a:tcPr>
                     <a:lnL w="12700" cap="flat" cmpd="sng" algn="ctr">
                       <a:solidFill>
                         <a:srgbClr val="D1D5DB"/>
@@ -8013,7 +8196,7 @@
                     <a:bodyPr/>
                     <a:lstStyle/>
                     <a:p>
-                      <a:pPr indent="0" marL="0">
+                      <a:pPr marL="0" indent="0">
                         <a:buNone/>
                       </a:pPr>
                       <a:r>
@@ -8034,7 +8217,7 @@
                       </a:endParaRPr>
                     </a:p>
                   </a:txBody>
-                  <a:tcPr marL="91440" marR="91440" marT="45720" marB="45720">
+                  <a:tcPr>
                     <a:lnL w="12700" cap="flat" cmpd="sng" algn="ctr">
                       <a:solidFill>
                         <a:srgbClr val="D1D5DB"/>
@@ -8073,6 +8256,11 @@
                     </a:lnB>
                   </a:tcPr>
                 </a:tc>
+                <a:extLst>
+                  <a:ext uri="{0D108BD9-81ED-4DB2-BD59-A6C34878D82A}">
+                    <a16:rowId xmlns:a16="http://schemas.microsoft.com/office/drawing/2014/main" val="10006"/>
+                  </a:ext>
+                </a:extLst>
               </a:tr>
               <a:tr h="400050">
                 <a:tc>
@@ -8080,7 +8268,7 @@
                     <a:bodyPr/>
                     <a:lstStyle/>
                     <a:p>
-                      <a:pPr indent="0" marL="0">
+                      <a:pPr marL="0" indent="0">
                         <a:buNone/>
                       </a:pPr>
                       <a:r>
@@ -8101,7 +8289,7 @@
                       </a:endParaRPr>
                     </a:p>
                   </a:txBody>
-                  <a:tcPr marL="91440" marR="91440" marT="45720" marB="45720">
+                  <a:tcPr>
                     <a:lnL w="12700" cap="flat" cmpd="sng" algn="ctr">
                       <a:solidFill>
                         <a:srgbClr val="D1D5DB"/>
@@ -8145,7 +8333,7 @@
                     <a:bodyPr/>
                     <a:lstStyle/>
                     <a:p>
-                      <a:pPr indent="0" marL="0">
+                      <a:pPr marL="0" indent="0">
                         <a:buNone/>
                       </a:pPr>
                       <a:r>
@@ -8166,7 +8354,7 @@
                       </a:endParaRPr>
                     </a:p>
                   </a:txBody>
-                  <a:tcPr marL="91440" marR="91440" marT="45720" marB="45720">
+                  <a:tcPr>
                     <a:lnL w="12700" cap="flat" cmpd="sng" algn="ctr">
                       <a:solidFill>
                         <a:srgbClr val="D1D5DB"/>
@@ -8205,6 +8393,11 @@
                     </a:lnB>
                   </a:tcPr>
                 </a:tc>
+                <a:extLst>
+                  <a:ext uri="{0D108BD9-81ED-4DB2-BD59-A6C34878D82A}">
+                    <a16:rowId xmlns:a16="http://schemas.microsoft.com/office/drawing/2014/main" val="10007"/>
+                  </a:ext>
+                </a:extLst>
               </a:tr>
             </a:tbl>
           </a:graphicData>
@@ -8226,6 +8419,7 @@
         <a:solidFill>
           <a:srgbClr val="F2F6FC"/>
         </a:solidFill>
+        <a:effectLst/>
       </p:bgPr>
     </p:bg>
     <p:spTree>
@@ -8266,6 +8460,13 @@
             <a:prstDash val="solid"/>
           </a:ln>
         </p:spPr>
+        <p:txBody>
+          <a:bodyPr/>
+          <a:lstStyle/>
+          <a:p>
+            <a:endParaRPr lang="en-LB"/>
+          </a:p>
+        </p:txBody>
       </p:sp>
       <p:sp>
         <p:nvSpPr>
@@ -8288,7 +8489,7 @@
           <a:bodyPr wrap="square" lIns="0" tIns="0" rIns="0" bIns="0" rtlCol="0" anchor="ctr"/>
           <a:lstStyle/>
           <a:p>
-            <a:pPr indent="0" marL="0">
+            <a:pPr marL="0" indent="0">
               <a:buNone/>
             </a:pPr>
             <a:r>
@@ -8330,17 +8531,24 @@
             <a:prstDash val="solid"/>
           </a:ln>
         </p:spPr>
+        <p:txBody>
+          <a:bodyPr/>
+          <a:lstStyle/>
+          <a:p>
+            <a:endParaRPr lang="en-LB"/>
+          </a:p>
+        </p:txBody>
       </p:sp>
       <p:pic>
         <p:nvPicPr>
-          <p:cNvPr id="5" name="Image 0" descr="preencoded.png">    </p:cNvPr>
+          <p:cNvPr id="5" name="Image 0" descr="preencoded.png"/>
           <p:cNvPicPr>
             <a:picLocks noChangeAspect="1"/>
           </p:cNvPicPr>
           <p:nvPr/>
         </p:nvPicPr>
         <p:blipFill>
-          <a:blip r:embed="rId1"/>
+          <a:blip r:embed="rId3"/>
           <a:stretch>
             <a:fillRect/>
           </a:stretch>
@@ -8376,7 +8584,7 @@
           <a:bodyPr wrap="square" rtlCol="0" anchor="ctr"/>
           <a:lstStyle/>
           <a:p>
-            <a:pPr algn="ctr" indent="0" marL="0">
+            <a:pPr marL="0" indent="0" algn="ctr">
               <a:buNone/>
             </a:pPr>
             <a:r>
@@ -8396,14 +8604,14 @@
       </p:sp>
       <p:pic>
         <p:nvPicPr>
-          <p:cNvPr id="7" name="Image 1" descr="preencoded.png">    </p:cNvPr>
+          <p:cNvPr id="7" name="Image 1" descr="preencoded.png"/>
           <p:cNvPicPr>
             <a:picLocks noChangeAspect="1"/>
           </p:cNvPicPr>
           <p:nvPr/>
         </p:nvPicPr>
         <p:blipFill>
-          <a:blip r:embed="rId2"/>
+          <a:blip r:embed="rId4"/>
           <a:stretch>
             <a:fillRect/>
           </a:stretch>
@@ -8439,7 +8647,7 @@
           <a:bodyPr wrap="square" rtlCol="0" anchor="ctr"/>
           <a:lstStyle/>
           <a:p>
-            <a:pPr algn="ctr" indent="0" marL="0">
+            <a:pPr marL="0" indent="0" algn="ctr">
               <a:buNone/>
             </a:pPr>
             <a:r>
@@ -8473,6 +8681,7 @@
         <a:solidFill>
           <a:srgbClr val="F2F6FC"/>
         </a:solidFill>
+        <a:effectLst/>
       </p:bgPr>
     </p:bg>
     <p:spTree>
@@ -8513,6 +8722,13 @@
             <a:prstDash val="solid"/>
           </a:ln>
         </p:spPr>
+        <p:txBody>
+          <a:bodyPr/>
+          <a:lstStyle/>
+          <a:p>
+            <a:endParaRPr lang="en-LB"/>
+          </a:p>
+        </p:txBody>
       </p:sp>
       <p:sp>
         <p:nvSpPr>
@@ -8535,7 +8751,7 @@
           <a:bodyPr wrap="square" lIns="0" tIns="0" rIns="0" bIns="0" rtlCol="0" anchor="ctr"/>
           <a:lstStyle/>
           <a:p>
-            <a:pPr indent="0" marL="0">
+            <a:pPr marL="0" indent="0">
               <a:buNone/>
             </a:pPr>
             <a:r>
@@ -8547,7 +8763,7 @@
                 <a:ea typeface="Calibri" pitchFamily="34" charset="-122"/>
                 <a:cs typeface="Calibri" pitchFamily="34" charset="-120"/>
               </a:rPr>
-              <a:t>Results — Test Set Performance</a:t>
+              <a:t>Results: Test Set Performance</a:t>
             </a:r>
             <a:endParaRPr lang="en-US" sz="2400" dirty="0"/>
           </a:p>
@@ -8577,6 +8793,13 @@
             <a:prstDash val="solid"/>
           </a:ln>
         </p:spPr>
+        <p:txBody>
+          <a:bodyPr/>
+          <a:lstStyle/>
+          <a:p>
+            <a:endParaRPr lang="en-LB"/>
+          </a:p>
+        </p:txBody>
       </p:sp>
       <p:sp>
         <p:nvSpPr>
@@ -8602,13 +8825,20 @@
             <a:prstDash val="solid"/>
           </a:ln>
           <a:effectLst>
-            <a:outerShdw sx="100000" sy="100000" kx="0" ky="0" algn="bl" rotWithShape="0" blurRad="101600" dist="38100" dir="8100000">
+            <a:outerShdw blurRad="101600" dist="38100" dir="8100000" algn="bl" rotWithShape="0">
               <a:srgbClr val="000000">
                 <a:alpha val="12000"/>
               </a:srgbClr>
             </a:outerShdw>
           </a:effectLst>
         </p:spPr>
+        <p:txBody>
+          <a:bodyPr/>
+          <a:lstStyle/>
+          <a:p>
+            <a:endParaRPr lang="en-LB"/>
+          </a:p>
+        </p:txBody>
       </p:sp>
       <p:sp>
         <p:nvSpPr>
@@ -8631,7 +8861,7 @@
           <a:bodyPr wrap="square" rtlCol="0" anchor="ctr"/>
           <a:lstStyle/>
           <a:p>
-            <a:pPr algn="ctr" indent="0" marL="0">
+            <a:pPr marL="0" indent="0" algn="ctr">
               <a:buNone/>
             </a:pPr>
             <a:r>
@@ -8670,7 +8900,7 @@
           <a:bodyPr wrap="square" rtlCol="0" anchor="ctr"/>
           <a:lstStyle/>
           <a:p>
-            <a:pPr algn="ctr" indent="0" marL="0">
+            <a:pPr marL="0" indent="0" algn="ctr">
               <a:buNone/>
             </a:pPr>
             <a:r>
@@ -8709,7 +8939,7 @@
           <a:bodyPr wrap="square" rtlCol="0" anchor="ctr"/>
           <a:lstStyle/>
           <a:p>
-            <a:pPr algn="ctr" indent="0" marL="0">
+            <a:pPr marL="0" indent="0" algn="ctr">
               <a:buNone/>
             </a:pPr>
             <a:r>
@@ -8751,13 +8981,20 @@
             <a:prstDash val="solid"/>
           </a:ln>
           <a:effectLst>
-            <a:outerShdw sx="100000" sy="100000" kx="0" ky="0" algn="bl" rotWithShape="0" blurRad="101600" dist="38100" dir="8100000">
+            <a:outerShdw blurRad="101600" dist="38100" dir="8100000" algn="bl" rotWithShape="0">
               <a:srgbClr val="000000">
                 <a:alpha val="12000"/>
               </a:srgbClr>
             </a:outerShdw>
           </a:effectLst>
         </p:spPr>
+        <p:txBody>
+          <a:bodyPr/>
+          <a:lstStyle/>
+          <a:p>
+            <a:endParaRPr lang="en-LB"/>
+          </a:p>
+        </p:txBody>
       </p:sp>
       <p:sp>
         <p:nvSpPr>
@@ -8780,7 +9017,7 @@
           <a:bodyPr wrap="square" rtlCol="0" anchor="ctr"/>
           <a:lstStyle/>
           <a:p>
-            <a:pPr algn="ctr" indent="0" marL="0">
+            <a:pPr marL="0" indent="0" algn="ctr">
               <a:buNone/>
             </a:pPr>
             <a:r>
@@ -8819,7 +9056,7 @@
           <a:bodyPr wrap="square" rtlCol="0" anchor="ctr"/>
           <a:lstStyle/>
           <a:p>
-            <a:pPr algn="ctr" indent="0" marL="0">
+            <a:pPr marL="0" indent="0" algn="ctr">
               <a:buNone/>
             </a:pPr>
             <a:r>
@@ -8858,7 +9095,7 @@
           <a:bodyPr wrap="square" rtlCol="0" anchor="ctr"/>
           <a:lstStyle/>
           <a:p>
-            <a:pPr algn="ctr" indent="0" marL="0">
+            <a:pPr marL="0" indent="0" algn="ctr">
               <a:buNone/>
             </a:pPr>
             <a:r>
@@ -8900,13 +9137,20 @@
             <a:prstDash val="solid"/>
           </a:ln>
           <a:effectLst>
-            <a:outerShdw sx="100000" sy="100000" kx="0" ky="0" algn="bl" rotWithShape="0" blurRad="101600" dist="38100" dir="8100000">
+            <a:outerShdw blurRad="101600" dist="38100" dir="8100000" algn="bl" rotWithShape="0">
               <a:srgbClr val="000000">
                 <a:alpha val="12000"/>
               </a:srgbClr>
             </a:outerShdw>
           </a:effectLst>
         </p:spPr>
+        <p:txBody>
+          <a:bodyPr/>
+          <a:lstStyle/>
+          <a:p>
+            <a:endParaRPr lang="en-LB"/>
+          </a:p>
+        </p:txBody>
       </p:sp>
       <p:sp>
         <p:nvSpPr>
@@ -8929,7 +9173,7 @@
           <a:bodyPr wrap="square" rtlCol="0" anchor="ctr"/>
           <a:lstStyle/>
           <a:p>
-            <a:pPr algn="ctr" indent="0" marL="0">
+            <a:pPr marL="0" indent="0" algn="ctr">
               <a:buNone/>
             </a:pPr>
             <a:r>
@@ -8968,7 +9212,7 @@
           <a:bodyPr wrap="square" rtlCol="0" anchor="ctr"/>
           <a:lstStyle/>
           <a:p>
-            <a:pPr algn="ctr" indent="0" marL="0">
+            <a:pPr marL="0" indent="0" algn="ctr">
               <a:buNone/>
             </a:pPr>
             <a:r>
@@ -9007,7 +9251,7 @@
           <a:bodyPr wrap="square" rtlCol="0" anchor="ctr"/>
           <a:lstStyle/>
           <a:p>
-            <a:pPr algn="ctr" indent="0" marL="0">
+            <a:pPr marL="0" indent="0" algn="ctr">
               <a:buNone/>
             </a:pPr>
             <a:r>
@@ -9027,21 +9271,21 @@
       </p:sp>
       <p:pic>
         <p:nvPicPr>
-          <p:cNvPr id="17" name="Image 0" descr="preencoded.png">    </p:cNvPr>
+          <p:cNvPr id="17" name="Image 0" descr="preencoded.png"/>
           <p:cNvPicPr>
             <a:picLocks noChangeAspect="1"/>
           </p:cNvPicPr>
           <p:nvPr/>
         </p:nvPicPr>
         <p:blipFill>
-          <a:blip r:embed="rId1"/>
+          <a:blip r:embed="rId3"/>
           <a:stretch>
             <a:fillRect/>
           </a:stretch>
         </p:blipFill>
         <p:spPr>
           <a:xfrm>
-            <a:off x="2167128" y="2331720"/>
+            <a:off x="2167128" y="2276061"/>
             <a:ext cx="4809744" cy="2377440"/>
           </a:xfrm>
           <a:prstGeom prst="rect">
@@ -9070,7 +9314,7 @@
           <a:bodyPr wrap="square" rtlCol="0" anchor="ctr"/>
           <a:lstStyle/>
           <a:p>
-            <a:pPr algn="ctr" indent="0" marL="0">
+            <a:pPr marL="0" indent="0" algn="ctr">
               <a:buNone/>
             </a:pPr>
             <a:r>
@@ -9104,6 +9348,7 @@
         <a:solidFill>
           <a:srgbClr val="F2F6FC"/>
         </a:solidFill>
+        <a:effectLst/>
       </p:bgPr>
     </p:bg>
     <p:spTree>
@@ -9144,6 +9389,13 @@
             <a:prstDash val="solid"/>
           </a:ln>
         </p:spPr>
+        <p:txBody>
+          <a:bodyPr/>
+          <a:lstStyle/>
+          <a:p>
+            <a:endParaRPr lang="en-LB"/>
+          </a:p>
+        </p:txBody>
       </p:sp>
       <p:sp>
         <p:nvSpPr>
@@ -9166,7 +9418,7 @@
           <a:bodyPr wrap="square" lIns="0" tIns="0" rIns="0" bIns="0" rtlCol="0" anchor="ctr"/>
           <a:lstStyle/>
           <a:p>
-            <a:pPr indent="0" marL="0">
+            <a:pPr marL="0" indent="0">
               <a:buNone/>
             </a:pPr>
             <a:r>
@@ -9208,17 +9460,24 @@
             <a:prstDash val="solid"/>
           </a:ln>
         </p:spPr>
+        <p:txBody>
+          <a:bodyPr/>
+          <a:lstStyle/>
+          <a:p>
+            <a:endParaRPr lang="en-LB"/>
+          </a:p>
+        </p:txBody>
       </p:sp>
       <p:pic>
         <p:nvPicPr>
-          <p:cNvPr id="5" name="Image 0" descr="preencoded.png">    </p:cNvPr>
+          <p:cNvPr id="5" name="Image 0" descr="preencoded.png"/>
           <p:cNvPicPr>
             <a:picLocks noChangeAspect="1"/>
           </p:cNvPicPr>
           <p:nvPr/>
         </p:nvPicPr>
         <p:blipFill>
-          <a:blip r:embed="rId1"/>
+          <a:blip r:embed="rId3"/>
           <a:stretch>
             <a:fillRect/>
           </a:stretch>
@@ -9254,7 +9513,7 @@
           <a:bodyPr wrap="square" rtlCol="0" anchor="ctr"/>
           <a:lstStyle/>
           <a:p>
-            <a:pPr algn="ctr" indent="0" marL="0">
+            <a:pPr marL="0" indent="0" algn="ctr">
               <a:buNone/>
             </a:pPr>
             <a:r>
@@ -9274,14 +9533,14 @@
       </p:sp>
       <p:pic>
         <p:nvPicPr>
-          <p:cNvPr id="7" name="Image 1" descr="preencoded.png">    </p:cNvPr>
+          <p:cNvPr id="7" name="Image 1" descr="preencoded.png"/>
           <p:cNvPicPr>
             <a:picLocks noChangeAspect="1"/>
           </p:cNvPicPr>
           <p:nvPr/>
         </p:nvPicPr>
         <p:blipFill>
-          <a:blip r:embed="rId2"/>
+          <a:blip r:embed="rId4"/>
           <a:stretch>
             <a:fillRect/>
           </a:stretch>
@@ -9317,7 +9576,7 @@
           <a:bodyPr wrap="square" rtlCol="0" anchor="ctr"/>
           <a:lstStyle/>
           <a:p>
-            <a:pPr algn="ctr" indent="0" marL="0">
+            <a:pPr marL="0" indent="0" algn="ctr">
               <a:buNone/>
             </a:pPr>
             <a:r>
@@ -9356,7 +9615,7 @@
           <a:bodyPr wrap="square" rtlCol="0" anchor="ctr"/>
           <a:lstStyle/>
           <a:p>
-            <a:pPr indent="0" marL="0">
+            <a:pPr marL="0" indent="0">
               <a:buNone/>
             </a:pPr>
             <a:r>
@@ -9408,7 +9667,7 @@
                 <a:ea typeface="Calibri" pitchFamily="34" charset="-122"/>
                 <a:cs typeface="Calibri" pitchFamily="34" charset="-120"/>
               </a:rPr>
-              <a:t>LSTM — 6,552 total errors, roughly symmetric between false positives and false negatives.</a:t>
+              <a:t>LSTM: 6,552 total errors, roughly symmetric between false positives and false negatives.</a:t>
             </a:r>
             <a:endParaRPr lang="en-US" sz="1250" dirty="0"/>
           </a:p>
@@ -9426,7 +9685,7 @@
                 <a:ea typeface="Calibri" pitchFamily="34" charset="-122"/>
                 <a:cs typeface="Calibri" pitchFamily="34" charset="-120"/>
               </a:rPr>
-              <a:t>GRU — 4,377 errors; biased toward false positives (recall 86% &gt; precision 80%).</a:t>
+              <a:t>GRU: 4,377 errors; biased toward false positives (recall 86% &gt; precision 80%).</a:t>
             </a:r>
             <a:endParaRPr lang="en-US" sz="1250" dirty="0"/>
           </a:p>
@@ -9444,7 +9703,7 @@
                 <a:ea typeface="Calibri" pitchFamily="34" charset="-122"/>
                 <a:cs typeface="Calibri" pitchFamily="34" charset="-120"/>
               </a:rPr>
-              <a:t>BERT — only 2,161 errors; near-balanced, precision 92.2% vs recall 90.4%.</a:t>
+              <a:t>BERT: only 2,161 errors; near-balanced, precision 92.2% vs recall 90.4%.</a:t>
             </a:r>
             <a:endParaRPr lang="en-US" sz="1250" dirty="0"/>
           </a:p>
@@ -9466,6 +9725,7 @@
         <a:solidFill>
           <a:srgbClr val="1E3A5F"/>
         </a:solidFill>
+        <a:effectLst/>
       </p:bgPr>
     </p:bg>
     <p:spTree>
@@ -9506,6 +9766,13 @@
             <a:prstDash val="solid"/>
           </a:ln>
         </p:spPr>
+        <p:txBody>
+          <a:bodyPr/>
+          <a:lstStyle/>
+          <a:p>
+            <a:endParaRPr lang="en-LB"/>
+          </a:p>
+        </p:txBody>
       </p:sp>
       <p:sp>
         <p:nvSpPr>
@@ -9528,7 +9795,7 @@
           <a:bodyPr wrap="square" rtlCol="0" anchor="ctr"/>
           <a:lstStyle/>
           <a:p>
-            <a:pPr indent="0" marL="0">
+            <a:pPr marL="0" indent="0">
               <a:buNone/>
             </a:pPr>
             <a:r>
@@ -9570,6 +9837,13 @@
             <a:prstDash val="solid"/>
           </a:ln>
         </p:spPr>
+        <p:txBody>
+          <a:bodyPr/>
+          <a:lstStyle/>
+          <a:p>
+            <a:endParaRPr lang="en-LB"/>
+          </a:p>
+        </p:txBody>
       </p:sp>
       <p:sp>
         <p:nvSpPr>
@@ -9595,6 +9869,13 @@
             <a:prstDash val="solid"/>
           </a:ln>
         </p:spPr>
+        <p:txBody>
+          <a:bodyPr/>
+          <a:lstStyle/>
+          <a:p>
+            <a:endParaRPr lang="en-LB"/>
+          </a:p>
+        </p:txBody>
       </p:sp>
       <p:sp>
         <p:nvSpPr>
@@ -9617,7 +9898,7 @@
           <a:bodyPr wrap="square" rtlCol="0" anchor="ctr"/>
           <a:lstStyle/>
           <a:p>
-            <a:pPr algn="ctr" indent="0" marL="0">
+            <a:pPr marL="0" indent="0" algn="ctr">
               <a:buNone/>
             </a:pPr>
             <a:r>
@@ -9656,7 +9937,7 @@
           <a:bodyPr wrap="square" rtlCol="0" anchor="ctr"/>
           <a:lstStyle/>
           <a:p>
-            <a:pPr indent="0" marL="0">
+            <a:pPr marL="0" indent="0">
               <a:buNone/>
             </a:pPr>
             <a:r>
@@ -9668,7 +9949,7 @@
                 <a:ea typeface="Calibri" pitchFamily="34" charset="-122"/>
                 <a:cs typeface="Calibri" pitchFamily="34" charset="-120"/>
               </a:rPr>
-              <a:t>BERT achieves 91.4% accuracy — outperforming GRU by +9% and LSTM by +18%. Pre-training on 3.3B words gives a decisive advantage.</a:t>
+              <a:t>BERT achieves 91.4% accuracy: outperforming GRU by +9% and LSTM by +18%. Pre-training on 3.3B words gives a decisive advantage.</a:t>
             </a:r>
             <a:endParaRPr lang="en-US" sz="1250" dirty="0"/>
           </a:p>
@@ -9698,6 +9979,13 @@
             <a:prstDash val="solid"/>
           </a:ln>
         </p:spPr>
+        <p:txBody>
+          <a:bodyPr/>
+          <a:lstStyle/>
+          <a:p>
+            <a:endParaRPr lang="en-LB"/>
+          </a:p>
+        </p:txBody>
       </p:sp>
       <p:sp>
         <p:nvSpPr>
@@ -9720,7 +10008,7 @@
           <a:bodyPr wrap="square" rtlCol="0" anchor="ctr"/>
           <a:lstStyle/>
           <a:p>
-            <a:pPr algn="ctr" indent="0" marL="0">
+            <a:pPr marL="0" indent="0" algn="ctr">
               <a:buNone/>
             </a:pPr>
             <a:r>
@@ -9759,7 +10047,7 @@
           <a:bodyPr wrap="square" rtlCol="0" anchor="ctr"/>
           <a:lstStyle/>
           <a:p>
-            <a:pPr indent="0" marL="0">
+            <a:pPr marL="0" indent="0">
               <a:buNone/>
             </a:pPr>
             <a:r>
@@ -9801,6 +10089,13 @@
             <a:prstDash val="solid"/>
           </a:ln>
         </p:spPr>
+        <p:txBody>
+          <a:bodyPr/>
+          <a:lstStyle/>
+          <a:p>
+            <a:endParaRPr lang="en-LB"/>
+          </a:p>
+        </p:txBody>
       </p:sp>
       <p:sp>
         <p:nvSpPr>
@@ -9823,7 +10118,7 @@
           <a:bodyPr wrap="square" rtlCol="0" anchor="ctr"/>
           <a:lstStyle/>
           <a:p>
-            <a:pPr algn="ctr" indent="0" marL="0">
+            <a:pPr marL="0" indent="0" algn="ctr">
               <a:buNone/>
             </a:pPr>
             <a:r>
@@ -9862,7 +10157,7 @@
           <a:bodyPr wrap="square" rtlCol="0" anchor="ctr"/>
           <a:lstStyle/>
           <a:p>
-            <a:pPr indent="0" marL="0">
+            <a:pPr marL="0" indent="0">
               <a:buNone/>
             </a:pPr>
             <a:r>
@@ -9874,7 +10169,29 @@
                 <a:ea typeface="Calibri" pitchFamily="34" charset="-122"/>
                 <a:cs typeface="Calibri" pitchFamily="34" charset="-120"/>
               </a:rPr>
-              <a:t>All models generalise well — the train/test accuracy gap is small, indicating no significant overfitting.</a:t>
+              <a:t>All models </a:t>
+            </a:r>
+            <a:r>
+              <a:rPr lang="en-US" sz="1250" dirty="0" err="1">
+                <a:solidFill>
+                  <a:srgbClr val="D0E8FF"/>
+                </a:solidFill>
+                <a:latin typeface="Calibri" pitchFamily="34" charset="0"/>
+                <a:ea typeface="Calibri" pitchFamily="34" charset="-122"/>
+                <a:cs typeface="Calibri" pitchFamily="34" charset="-120"/>
+              </a:rPr>
+              <a:t>generalise</a:t>
+            </a:r>
+            <a:r>
+              <a:rPr lang="en-US" sz="1250" dirty="0">
+                <a:solidFill>
+                  <a:srgbClr val="D0E8FF"/>
+                </a:solidFill>
+                <a:latin typeface="Calibri" pitchFamily="34" charset="0"/>
+                <a:ea typeface="Calibri" pitchFamily="34" charset="-122"/>
+                <a:cs typeface="Calibri" pitchFamily="34" charset="-120"/>
+              </a:rPr>
+              <a:t> well: the train/test accuracy gap is small, indicating no significant overfitting.</a:t>
             </a:r>
             <a:endParaRPr lang="en-US" sz="1250" dirty="0"/>
           </a:p>
@@ -9904,6 +10221,13 @@
             <a:prstDash val="solid"/>
           </a:ln>
         </p:spPr>
+        <p:txBody>
+          <a:bodyPr/>
+          <a:lstStyle/>
+          <a:p>
+            <a:endParaRPr lang="en-LB"/>
+          </a:p>
+        </p:txBody>
       </p:sp>
       <p:sp>
         <p:nvSpPr>
@@ -9926,7 +10250,7 @@
           <a:bodyPr wrap="square" rtlCol="0" anchor="ctr"/>
           <a:lstStyle/>
           <a:p>
-            <a:pPr algn="ctr" indent="0" marL="0">
+            <a:pPr marL="0" indent="0" algn="ctr">
               <a:buNone/>
             </a:pPr>
             <a:r>
@@ -9965,7 +10289,7 @@
           <a:bodyPr wrap="square" rtlCol="0" anchor="ctr"/>
           <a:lstStyle/>
           <a:p>
-            <a:pPr indent="0" marL="0">
+            <a:pPr marL="0" indent="0">
               <a:buNone/>
             </a:pPr>
             <a:r>
@@ -10284,4 +10608,319 @@
     </a:ext>
   </a:extLst>
 </a:theme>
+</file>
+
+<file path=ppt/theme/theme2.xml><?xml version="1.0" encoding="utf-8"?>
+<a:theme xmlns:a="http://schemas.openxmlformats.org/drawingml/2006/main" name="Office Theme">
+  <a:themeElements>
+    <a:clrScheme name="Office">
+      <a:dk1>
+        <a:sysClr val="windowText" lastClr="000000"/>
+      </a:dk1>
+      <a:lt1>
+        <a:sysClr val="window" lastClr="FFFFFF"/>
+      </a:lt1>
+      <a:dk2>
+        <a:srgbClr val="0E2841"/>
+      </a:dk2>
+      <a:lt2>
+        <a:srgbClr val="E8E8E8"/>
+      </a:lt2>
+      <a:accent1>
+        <a:srgbClr val="156082"/>
+      </a:accent1>
+      <a:accent2>
+        <a:srgbClr val="E97132"/>
+      </a:accent2>
+      <a:accent3>
+        <a:srgbClr val="196B24"/>
+      </a:accent3>
+      <a:accent4>
+        <a:srgbClr val="0F9ED5"/>
+      </a:accent4>
+      <a:accent5>
+        <a:srgbClr val="A02B93"/>
+      </a:accent5>
+      <a:accent6>
+        <a:srgbClr val="4EA72E"/>
+      </a:accent6>
+      <a:hlink>
+        <a:srgbClr val="467886"/>
+      </a:hlink>
+      <a:folHlink>
+        <a:srgbClr val="96607D"/>
+      </a:folHlink>
+    </a:clrScheme>
+    <a:fontScheme name="Office">
+      <a:majorFont>
+        <a:latin typeface="Aptos Display" panose="02110004020202020204"/>
+        <a:ea typeface=""/>
+        <a:cs typeface=""/>
+        <a:font script="Jpan" typeface="游ゴシック Light"/>
+        <a:font script="Hang" typeface="맑은 고딕"/>
+        <a:font script="Hans" typeface="等线 Light"/>
+        <a:font script="Hant" typeface="新細明體"/>
+        <a:font script="Arab" typeface="Times New Roman"/>
+        <a:font script="Hebr" typeface="Times New Roman"/>
+        <a:font script="Thai" typeface="Angsana New"/>
+        <a:font script="Ethi" typeface="Nyala"/>
+        <a:font script="Beng" typeface="Vrinda"/>
+        <a:font script="Gujr" typeface="Shruti"/>
+        <a:font script="Khmr" typeface="MoolBoran"/>
+        <a:font script="Knda" typeface="Tunga"/>
+        <a:font script="Guru" typeface="Raavi"/>
+        <a:font script="Cans" typeface="Euphemia"/>
+        <a:font script="Cher" typeface="Plantagenet Cherokee"/>
+        <a:font script="Yiii" typeface="Microsoft Yi Baiti"/>
+        <a:font script="Tibt" typeface="Microsoft Himalaya"/>
+        <a:font script="Thaa" typeface="MV Boli"/>
+        <a:font script="Deva" typeface="Mangal"/>
+        <a:font script="Telu" typeface="Gautami"/>
+        <a:font script="Taml" typeface="Latha"/>
+        <a:font script="Syrc" typeface="Estrangelo Edessa"/>
+        <a:font script="Orya" typeface="Kalinga"/>
+        <a:font script="Mlym" typeface="Kartika"/>
+        <a:font script="Laoo" typeface="DokChampa"/>
+        <a:font script="Sinh" typeface="Iskoola Pota"/>
+        <a:font script="Mong" typeface="Mongolian Baiti"/>
+        <a:font script="Viet" typeface="Times New Roman"/>
+        <a:font script="Uigh" typeface="Microsoft Uighur"/>
+        <a:font script="Geor" typeface="Sylfaen"/>
+        <a:font script="Armn" typeface="Arial"/>
+        <a:font script="Bugi" typeface="Leelawadee UI"/>
+        <a:font script="Bopo" typeface="Microsoft JhengHei"/>
+        <a:font script="Java" typeface="Javanese Text"/>
+        <a:font script="Lisu" typeface="Segoe UI"/>
+        <a:font script="Mymr" typeface="Myanmar Text"/>
+        <a:font script="Nkoo" typeface="Ebrima"/>
+        <a:font script="Olck" typeface="Nirmala UI"/>
+        <a:font script="Osma" typeface="Ebrima"/>
+        <a:font script="Phag" typeface="Phagspa"/>
+        <a:font script="Syrn" typeface="Estrangelo Edessa"/>
+        <a:font script="Syrj" typeface="Estrangelo Edessa"/>
+        <a:font script="Syre" typeface="Estrangelo Edessa"/>
+        <a:font script="Sora" typeface="Nirmala UI"/>
+        <a:font script="Tale" typeface="Microsoft Tai Le"/>
+        <a:font script="Talu" typeface="Microsoft New Tai Lue"/>
+        <a:font script="Tfng" typeface="Ebrima"/>
+      </a:majorFont>
+      <a:minorFont>
+        <a:latin typeface="Aptos" panose="02110004020202020204"/>
+        <a:ea typeface=""/>
+        <a:cs typeface=""/>
+        <a:font script="Jpan" typeface="游ゴシック"/>
+        <a:font script="Hang" typeface="맑은 고딕"/>
+        <a:font script="Hans" typeface="等线"/>
+        <a:font script="Hant" typeface="新細明體"/>
+        <a:font script="Arab" typeface="Arial"/>
+        <a:font script="Hebr" typeface="Arial"/>
+        <a:font script="Thai" typeface="Cordia New"/>
+        <a:font script="Ethi" typeface="Nyala"/>
+        <a:font script="Beng" typeface="Vrinda"/>
+        <a:font script="Gujr" typeface="Shruti"/>
+        <a:font script="Khmr" typeface="DaunPenh"/>
+        <a:font script="Knda" typeface="Tunga"/>
+        <a:font script="Guru" typeface="Raavi"/>
+        <a:font script="Cans" typeface="Euphemia"/>
+        <a:font script="Cher" typeface="Plantagenet Cherokee"/>
+        <a:font script="Yiii" typeface="Microsoft Yi Baiti"/>
+        <a:font script="Tibt" typeface="Microsoft Himalaya"/>
+        <a:font script="Thaa" typeface="MV Boli"/>
+        <a:font script="Deva" typeface="Mangal"/>
+        <a:font script="Telu" typeface="Gautami"/>
+        <a:font script="Taml" typeface="Latha"/>
+        <a:font script="Syrc" typeface="Estrangelo Edessa"/>
+        <a:font script="Orya" typeface="Kalinga"/>
+        <a:font script="Mlym" typeface="Kartika"/>
+        <a:font script="Laoo" typeface="DokChampa"/>
+        <a:font script="Sinh" typeface="Iskoola Pota"/>
+        <a:font script="Mong" typeface="Mongolian Baiti"/>
+        <a:font script="Viet" typeface="Arial"/>
+        <a:font script="Uigh" typeface="Microsoft Uighur"/>
+        <a:font script="Geor" typeface="Sylfaen"/>
+        <a:font script="Armn" typeface="Arial"/>
+        <a:font script="Bugi" typeface="Leelawadee UI"/>
+        <a:font script="Bopo" typeface="Microsoft JhengHei"/>
+        <a:font script="Java" typeface="Javanese Text"/>
+        <a:font script="Lisu" typeface="Segoe UI"/>
+        <a:font script="Mymr" typeface="Myanmar Text"/>
+        <a:font script="Nkoo" typeface="Ebrima"/>
+        <a:font script="Olck" typeface="Nirmala UI"/>
+        <a:font script="Osma" typeface="Ebrima"/>
+        <a:font script="Phag" typeface="Phagspa"/>
+        <a:font script="Syrn" typeface="Estrangelo Edessa"/>
+        <a:font script="Syrj" typeface="Estrangelo Edessa"/>
+        <a:font script="Syre" typeface="Estrangelo Edessa"/>
+        <a:font script="Sora" typeface="Nirmala UI"/>
+        <a:font script="Tale" typeface="Microsoft Tai Le"/>
+        <a:font script="Talu" typeface="Microsoft New Tai Lue"/>
+        <a:font script="Tfng" typeface="Ebrima"/>
+      </a:minorFont>
+    </a:fontScheme>
+    <a:fmtScheme name="Office">
+      <a:fillStyleLst>
+        <a:solidFill>
+          <a:schemeClr val="phClr"/>
+        </a:solidFill>
+        <a:gradFill rotWithShape="1">
+          <a:gsLst>
+            <a:gs pos="0">
+              <a:schemeClr val="phClr">
+                <a:lumMod val="110000"/>
+                <a:satMod val="105000"/>
+                <a:tint val="67000"/>
+              </a:schemeClr>
+            </a:gs>
+            <a:gs pos="50000">
+              <a:schemeClr val="phClr">
+                <a:lumMod val="105000"/>
+                <a:satMod val="103000"/>
+                <a:tint val="73000"/>
+              </a:schemeClr>
+            </a:gs>
+            <a:gs pos="100000">
+              <a:schemeClr val="phClr">
+                <a:lumMod val="105000"/>
+                <a:satMod val="109000"/>
+                <a:tint val="81000"/>
+              </a:schemeClr>
+            </a:gs>
+          </a:gsLst>
+          <a:lin ang="5400000" scaled="0"/>
+        </a:gradFill>
+        <a:gradFill rotWithShape="1">
+          <a:gsLst>
+            <a:gs pos="0">
+              <a:schemeClr val="phClr">
+                <a:satMod val="103000"/>
+                <a:lumMod val="102000"/>
+                <a:tint val="94000"/>
+              </a:schemeClr>
+            </a:gs>
+            <a:gs pos="50000">
+              <a:schemeClr val="phClr">
+                <a:satMod val="110000"/>
+                <a:lumMod val="100000"/>
+                <a:shade val="100000"/>
+              </a:schemeClr>
+            </a:gs>
+            <a:gs pos="100000">
+              <a:schemeClr val="phClr">
+                <a:lumMod val="99000"/>
+                <a:satMod val="120000"/>
+                <a:shade val="78000"/>
+              </a:schemeClr>
+            </a:gs>
+          </a:gsLst>
+          <a:lin ang="5400000" scaled="0"/>
+        </a:gradFill>
+      </a:fillStyleLst>
+      <a:lnStyleLst>
+        <a:ln w="12700" cap="flat" cmpd="sng" algn="ctr">
+          <a:solidFill>
+            <a:schemeClr val="phClr"/>
+          </a:solidFill>
+          <a:prstDash val="solid"/>
+          <a:miter lim="800000"/>
+        </a:ln>
+        <a:ln w="19050" cap="flat" cmpd="sng" algn="ctr">
+          <a:solidFill>
+            <a:schemeClr val="phClr"/>
+          </a:solidFill>
+          <a:prstDash val="solid"/>
+          <a:miter lim="800000"/>
+        </a:ln>
+        <a:ln w="25400" cap="flat" cmpd="sng" algn="ctr">
+          <a:solidFill>
+            <a:schemeClr val="phClr"/>
+          </a:solidFill>
+          <a:prstDash val="solid"/>
+          <a:miter lim="800000"/>
+        </a:ln>
+      </a:lnStyleLst>
+      <a:effectStyleLst>
+        <a:effectStyle>
+          <a:effectLst/>
+        </a:effectStyle>
+        <a:effectStyle>
+          <a:effectLst/>
+        </a:effectStyle>
+        <a:effectStyle>
+          <a:effectLst>
+            <a:outerShdw blurRad="57150" dist="19050" dir="5400000" algn="ctr" rotWithShape="0">
+              <a:srgbClr val="000000">
+                <a:alpha val="63000"/>
+              </a:srgbClr>
+            </a:outerShdw>
+          </a:effectLst>
+        </a:effectStyle>
+      </a:effectStyleLst>
+      <a:bgFillStyleLst>
+        <a:solidFill>
+          <a:schemeClr val="phClr"/>
+        </a:solidFill>
+        <a:solidFill>
+          <a:schemeClr val="phClr">
+            <a:tint val="95000"/>
+            <a:satMod val="170000"/>
+          </a:schemeClr>
+        </a:solidFill>
+        <a:gradFill rotWithShape="1">
+          <a:gsLst>
+            <a:gs pos="0">
+              <a:schemeClr val="phClr">
+                <a:tint val="93000"/>
+                <a:satMod val="150000"/>
+                <a:shade val="98000"/>
+                <a:lumMod val="102000"/>
+              </a:schemeClr>
+            </a:gs>
+            <a:gs pos="50000">
+              <a:schemeClr val="phClr">
+                <a:tint val="98000"/>
+                <a:satMod val="130000"/>
+                <a:shade val="90000"/>
+                <a:lumMod val="103000"/>
+              </a:schemeClr>
+            </a:gs>
+            <a:gs pos="100000">
+              <a:schemeClr val="phClr">
+                <a:shade val="63000"/>
+                <a:satMod val="120000"/>
+              </a:schemeClr>
+            </a:gs>
+          </a:gsLst>
+          <a:lin ang="5400000" scaled="0"/>
+        </a:gradFill>
+      </a:bgFillStyleLst>
+    </a:fmtScheme>
+  </a:themeElements>
+  <a:objectDefaults>
+    <a:lnDef>
+      <a:spPr/>
+      <a:bodyPr/>
+      <a:lstStyle/>
+      <a:style>
+        <a:lnRef idx="2">
+          <a:schemeClr val="accent1"/>
+        </a:lnRef>
+        <a:fillRef idx="0">
+          <a:schemeClr val="accent1"/>
+        </a:fillRef>
+        <a:effectRef idx="1">
+          <a:schemeClr val="accent1"/>
+        </a:effectRef>
+        <a:fontRef idx="minor">
+          <a:schemeClr val="tx1"/>
+        </a:fontRef>
+      </a:style>
+    </a:lnDef>
+  </a:objectDefaults>
+  <a:extraClrSchemeLst/>
+  <a:extLst>
+    <a:ext uri="{05A4C25C-085E-4340-85A3-A5531E510DB2}">
+      <thm15:themeFamily xmlns:thm15="http://schemas.microsoft.com/office/thememl/2012/main" name="Office Theme" id="{2E142A2C-CD16-42D6-873A-C26D2A0506FA}" vid="{1BDDFF52-6CD6-40A5-AB3C-68EB2F1E4D0A}"/>
+    </a:ext>
+  </a:extLst>
+</a:theme>
 </file>
--- a/report/Sentiment_Analysis_Presentation.pptx
+++ b/report/Sentiment_Analysis_Presentation.pptx
@@ -2734,7 +2734,7 @@
                 <a:ea typeface="Calibri" pitchFamily="34" charset="-122"/>
                 <a:cs typeface="Calibri" pitchFamily="34" charset="-120"/>
               </a:rPr>
-              <a:t>Dataset — IMDb Large Movie Review Dataset</a:t>
+              <a:t>Dataset: IMDb Large Movie Review Dataset</a:t>
             </a:r>
             <a:endParaRPr lang="en-US" sz="2400" dirty="0"/>
           </a:p>
@@ -9430,7 +9430,7 @@
                 <a:ea typeface="Calibri" pitchFamily="34" charset="-122"/>
                 <a:cs typeface="Calibri" pitchFamily="34" charset="-120"/>
               </a:rPr>
-              <a:t>Results — Confusion Matrix Analysis</a:t>
+              <a:t>Results: Confusion Matrix Analysis</a:t>
             </a:r>
             <a:endParaRPr lang="en-US" sz="2400" dirty="0"/>
           </a:p>
